--- a/Assignment7.1-Attack_MNIST_Presentation.pptx
+++ b/Assignment7.1-Attack_MNIST_Presentation.pptx
@@ -6,11 +6,14 @@
     <p:sldMasterId id="2147483678" r:id="rId2"/>
     <p:sldMasterId id="2147483707" r:id="rId3"/>
   </p:sldMasterIdLst>
+  <p:notesMasterIdLst>
+    <p:notesMasterId r:id="rId12"/>
+  </p:notesMasterIdLst>
   <p:sldIdLst>
     <p:sldId id="256" r:id="rId4"/>
     <p:sldId id="258" r:id="rId5"/>
-    <p:sldId id="263" r:id="rId6"/>
-    <p:sldId id="259" r:id="rId7"/>
+    <p:sldId id="259" r:id="rId6"/>
+    <p:sldId id="265" r:id="rId7"/>
     <p:sldId id="261" r:id="rId8"/>
     <p:sldId id="262" r:id="rId9"/>
     <p:sldId id="257" r:id="rId10"/>
@@ -130,6 +133,846 @@
     </p:ext>
   </p:extLst>
 </p:presentation>
+</file>
+
+<file path=ppt/notesMasters/notesMaster1.xml><?xml version="1.0" encoding="utf-8"?>
+<p:notesMaster xmlns:a="http://schemas.openxmlformats.org/drawingml/2006/main" xmlns:r="http://schemas.openxmlformats.org/officeDocument/2006/relationships" xmlns:p="http://schemas.openxmlformats.org/presentationml/2006/main">
+  <p:cSld>
+    <p:bg>
+      <p:bgRef idx="1001">
+        <a:schemeClr val="bg1"/>
+      </p:bgRef>
+    </p:bg>
+    <p:spTree>
+      <p:nvGrpSpPr>
+        <p:cNvPr id="1" name=""/>
+        <p:cNvGrpSpPr/>
+        <p:nvPr/>
+      </p:nvGrpSpPr>
+      <p:grpSpPr>
+        <a:xfrm>
+          <a:off x="0" y="0"/>
+          <a:ext cx="0" cy="0"/>
+          <a:chOff x="0" y="0"/>
+          <a:chExt cx="0" cy="0"/>
+        </a:xfrm>
+      </p:grpSpPr>
+      <p:sp>
+        <p:nvSpPr>
+          <p:cNvPr id="2" name="Header Placeholder 1"/>
+          <p:cNvSpPr>
+            <a:spLocks noGrp="1"/>
+          </p:cNvSpPr>
+          <p:nvPr>
+            <p:ph type="hdr" sz="quarter"/>
+          </p:nvPr>
+        </p:nvSpPr>
+        <p:spPr>
+          <a:xfrm>
+            <a:off x="0" y="0"/>
+            <a:ext cx="2971800" cy="458788"/>
+          </a:xfrm>
+          <a:prstGeom prst="rect">
+            <a:avLst/>
+          </a:prstGeom>
+        </p:spPr>
+        <p:txBody>
+          <a:bodyPr vert="horz" lIns="91440" tIns="45720" rIns="91440" bIns="45720" rtlCol="0"/>
+          <a:lstStyle>
+            <a:lvl1pPr algn="l">
+              <a:defRPr sz="1200"/>
+            </a:lvl1pPr>
+          </a:lstStyle>
+          <a:p>
+            <a:endParaRPr lang="en-US"/>
+          </a:p>
+        </p:txBody>
+      </p:sp>
+      <p:sp>
+        <p:nvSpPr>
+          <p:cNvPr id="3" name="Date Placeholder 2"/>
+          <p:cNvSpPr>
+            <a:spLocks noGrp="1"/>
+          </p:cNvSpPr>
+          <p:nvPr>
+            <p:ph type="dt" idx="1"/>
+          </p:nvPr>
+        </p:nvSpPr>
+        <p:spPr>
+          <a:xfrm>
+            <a:off x="3884613" y="0"/>
+            <a:ext cx="2971800" cy="458788"/>
+          </a:xfrm>
+          <a:prstGeom prst="rect">
+            <a:avLst/>
+          </a:prstGeom>
+        </p:spPr>
+        <p:txBody>
+          <a:bodyPr vert="horz" lIns="91440" tIns="45720" rIns="91440" bIns="45720" rtlCol="0"/>
+          <a:lstStyle>
+            <a:lvl1pPr algn="r">
+              <a:defRPr sz="1200"/>
+            </a:lvl1pPr>
+          </a:lstStyle>
+          <a:p>
+            <a:fld id="{AC8396E9-43EF-7E4F-8CCE-54570B0AB4EB}" type="datetimeFigureOut">
+              <a:rPr lang="en-US" smtClean="0"/>
+              <a:t>5/30/26</a:t>
+            </a:fld>
+            <a:endParaRPr lang="en-US"/>
+          </a:p>
+        </p:txBody>
+      </p:sp>
+      <p:sp>
+        <p:nvSpPr>
+          <p:cNvPr id="4" name="Slide Image Placeholder 3"/>
+          <p:cNvSpPr>
+            <a:spLocks noGrp="1" noRot="1" noChangeAspect="1"/>
+          </p:cNvSpPr>
+          <p:nvPr>
+            <p:ph type="sldImg" idx="2"/>
+          </p:nvPr>
+        </p:nvSpPr>
+        <p:spPr>
+          <a:xfrm>
+            <a:off x="685800" y="1143000"/>
+            <a:ext cx="5486400" cy="3086100"/>
+          </a:xfrm>
+          <a:prstGeom prst="rect">
+            <a:avLst/>
+          </a:prstGeom>
+          <a:noFill/>
+          <a:ln w="12700">
+            <a:solidFill>
+              <a:prstClr val="black"/>
+            </a:solidFill>
+          </a:ln>
+        </p:spPr>
+        <p:txBody>
+          <a:bodyPr vert="horz" lIns="91440" tIns="45720" rIns="91440" bIns="45720" rtlCol="0" anchor="ctr"/>
+          <a:lstStyle/>
+          <a:p>
+            <a:endParaRPr lang="en-US"/>
+          </a:p>
+        </p:txBody>
+      </p:sp>
+      <p:sp>
+        <p:nvSpPr>
+          <p:cNvPr id="5" name="Notes Placeholder 4"/>
+          <p:cNvSpPr>
+            <a:spLocks noGrp="1"/>
+          </p:cNvSpPr>
+          <p:nvPr>
+            <p:ph type="body" sz="quarter" idx="3"/>
+          </p:nvPr>
+        </p:nvSpPr>
+        <p:spPr>
+          <a:xfrm>
+            <a:off x="685800" y="4400550"/>
+            <a:ext cx="5486400" cy="3600450"/>
+          </a:xfrm>
+          <a:prstGeom prst="rect">
+            <a:avLst/>
+          </a:prstGeom>
+        </p:spPr>
+        <p:txBody>
+          <a:bodyPr vert="horz" lIns="91440" tIns="45720" rIns="91440" bIns="45720" rtlCol="0"/>
+          <a:lstStyle/>
+          <a:p>
+            <a:pPr lvl="0"/>
+            <a:r>
+              <a:rPr lang="en-US"/>
+              <a:t>Click to edit Master text styles</a:t>
+            </a:r>
+          </a:p>
+          <a:p>
+            <a:pPr lvl="1"/>
+            <a:r>
+              <a:rPr lang="en-US"/>
+              <a:t>Second level</a:t>
+            </a:r>
+          </a:p>
+          <a:p>
+            <a:pPr lvl="2"/>
+            <a:r>
+              <a:rPr lang="en-US"/>
+              <a:t>Third level</a:t>
+            </a:r>
+          </a:p>
+          <a:p>
+            <a:pPr lvl="3"/>
+            <a:r>
+              <a:rPr lang="en-US"/>
+              <a:t>Fourth level</a:t>
+            </a:r>
+          </a:p>
+          <a:p>
+            <a:pPr lvl="4"/>
+            <a:r>
+              <a:rPr lang="en-US"/>
+              <a:t>Fifth level</a:t>
+            </a:r>
+          </a:p>
+        </p:txBody>
+      </p:sp>
+      <p:sp>
+        <p:nvSpPr>
+          <p:cNvPr id="6" name="Footer Placeholder 5"/>
+          <p:cNvSpPr>
+            <a:spLocks noGrp="1"/>
+          </p:cNvSpPr>
+          <p:nvPr>
+            <p:ph type="ftr" sz="quarter" idx="4"/>
+          </p:nvPr>
+        </p:nvSpPr>
+        <p:spPr>
+          <a:xfrm>
+            <a:off x="0" y="8685213"/>
+            <a:ext cx="2971800" cy="458787"/>
+          </a:xfrm>
+          <a:prstGeom prst="rect">
+            <a:avLst/>
+          </a:prstGeom>
+        </p:spPr>
+        <p:txBody>
+          <a:bodyPr vert="horz" lIns="91440" tIns="45720" rIns="91440" bIns="45720" rtlCol="0" anchor="b"/>
+          <a:lstStyle>
+            <a:lvl1pPr algn="l">
+              <a:defRPr sz="1200"/>
+            </a:lvl1pPr>
+          </a:lstStyle>
+          <a:p>
+            <a:endParaRPr lang="en-US"/>
+          </a:p>
+        </p:txBody>
+      </p:sp>
+      <p:sp>
+        <p:nvSpPr>
+          <p:cNvPr id="7" name="Slide Number Placeholder 6"/>
+          <p:cNvSpPr>
+            <a:spLocks noGrp="1"/>
+          </p:cNvSpPr>
+          <p:nvPr>
+            <p:ph type="sldNum" sz="quarter" idx="5"/>
+          </p:nvPr>
+        </p:nvSpPr>
+        <p:spPr>
+          <a:xfrm>
+            <a:off x="3884613" y="8685213"/>
+            <a:ext cx="2971800" cy="458787"/>
+          </a:xfrm>
+          <a:prstGeom prst="rect">
+            <a:avLst/>
+          </a:prstGeom>
+        </p:spPr>
+        <p:txBody>
+          <a:bodyPr vert="horz" lIns="91440" tIns="45720" rIns="91440" bIns="45720" rtlCol="0" anchor="b"/>
+          <a:lstStyle>
+            <a:lvl1pPr algn="r">
+              <a:defRPr sz="1200"/>
+            </a:lvl1pPr>
+          </a:lstStyle>
+          <a:p>
+            <a:fld id="{1270B60B-44A9-7F47-8298-E0EB77EACFE7}" type="slidenum">
+              <a:rPr lang="en-US" smtClean="0"/>
+              <a:t>‹#›</a:t>
+            </a:fld>
+            <a:endParaRPr lang="en-US"/>
+          </a:p>
+        </p:txBody>
+      </p:sp>
+    </p:spTree>
+    <p:extLst>
+      <p:ext uri="{BB962C8B-B14F-4D97-AF65-F5344CB8AC3E}">
+        <p14:creationId xmlns:p14="http://schemas.microsoft.com/office/powerpoint/2010/main" val="2023550812"/>
+      </p:ext>
+    </p:extLst>
+  </p:cSld>
+  <p:clrMap bg1="lt1" tx1="dk1" bg2="lt2" tx2="dk2" accent1="accent1" accent2="accent2" accent3="accent3" accent4="accent4" accent5="accent5" accent6="accent6" hlink="hlink" folHlink="folHlink"/>
+  <p:notesStyle>
+    <a:lvl1pPr marL="0" algn="l" defTabSz="914400" rtl="0" eaLnBrk="1" latinLnBrk="0" hangingPunct="1">
+      <a:defRPr sz="1200" kern="1200">
+        <a:solidFill>
+          <a:schemeClr val="tx1"/>
+        </a:solidFill>
+        <a:latin typeface="+mn-lt"/>
+        <a:ea typeface="+mn-ea"/>
+        <a:cs typeface="+mn-cs"/>
+      </a:defRPr>
+    </a:lvl1pPr>
+    <a:lvl2pPr marL="457200" algn="l" defTabSz="914400" rtl="0" eaLnBrk="1" latinLnBrk="0" hangingPunct="1">
+      <a:defRPr sz="1200" kern="1200">
+        <a:solidFill>
+          <a:schemeClr val="tx1"/>
+        </a:solidFill>
+        <a:latin typeface="+mn-lt"/>
+        <a:ea typeface="+mn-ea"/>
+        <a:cs typeface="+mn-cs"/>
+      </a:defRPr>
+    </a:lvl2pPr>
+    <a:lvl3pPr marL="914400" algn="l" defTabSz="914400" rtl="0" eaLnBrk="1" latinLnBrk="0" hangingPunct="1">
+      <a:defRPr sz="1200" kern="1200">
+        <a:solidFill>
+          <a:schemeClr val="tx1"/>
+        </a:solidFill>
+        <a:latin typeface="+mn-lt"/>
+        <a:ea typeface="+mn-ea"/>
+        <a:cs typeface="+mn-cs"/>
+      </a:defRPr>
+    </a:lvl3pPr>
+    <a:lvl4pPr marL="1371600" algn="l" defTabSz="914400" rtl="0" eaLnBrk="1" latinLnBrk="0" hangingPunct="1">
+      <a:defRPr sz="1200" kern="1200">
+        <a:solidFill>
+          <a:schemeClr val="tx1"/>
+        </a:solidFill>
+        <a:latin typeface="+mn-lt"/>
+        <a:ea typeface="+mn-ea"/>
+        <a:cs typeface="+mn-cs"/>
+      </a:defRPr>
+    </a:lvl4pPr>
+    <a:lvl5pPr marL="1828800" algn="l" defTabSz="914400" rtl="0" eaLnBrk="1" latinLnBrk="0" hangingPunct="1">
+      <a:defRPr sz="1200" kern="1200">
+        <a:solidFill>
+          <a:schemeClr val="tx1"/>
+        </a:solidFill>
+        <a:latin typeface="+mn-lt"/>
+        <a:ea typeface="+mn-ea"/>
+        <a:cs typeface="+mn-cs"/>
+      </a:defRPr>
+    </a:lvl5pPr>
+    <a:lvl6pPr marL="2286000" algn="l" defTabSz="914400" rtl="0" eaLnBrk="1" latinLnBrk="0" hangingPunct="1">
+      <a:defRPr sz="1200" kern="1200">
+        <a:solidFill>
+          <a:schemeClr val="tx1"/>
+        </a:solidFill>
+        <a:latin typeface="+mn-lt"/>
+        <a:ea typeface="+mn-ea"/>
+        <a:cs typeface="+mn-cs"/>
+      </a:defRPr>
+    </a:lvl6pPr>
+    <a:lvl7pPr marL="2743200" algn="l" defTabSz="914400" rtl="0" eaLnBrk="1" latinLnBrk="0" hangingPunct="1">
+      <a:defRPr sz="1200" kern="1200">
+        <a:solidFill>
+          <a:schemeClr val="tx1"/>
+        </a:solidFill>
+        <a:latin typeface="+mn-lt"/>
+        <a:ea typeface="+mn-ea"/>
+        <a:cs typeface="+mn-cs"/>
+      </a:defRPr>
+    </a:lvl7pPr>
+    <a:lvl8pPr marL="3200400" algn="l" defTabSz="914400" rtl="0" eaLnBrk="1" latinLnBrk="0" hangingPunct="1">
+      <a:defRPr sz="1200" kern="1200">
+        <a:solidFill>
+          <a:schemeClr val="tx1"/>
+        </a:solidFill>
+        <a:latin typeface="+mn-lt"/>
+        <a:ea typeface="+mn-ea"/>
+        <a:cs typeface="+mn-cs"/>
+      </a:defRPr>
+    </a:lvl8pPr>
+    <a:lvl9pPr marL="3657600" algn="l" defTabSz="914400" rtl="0" eaLnBrk="1" latinLnBrk="0" hangingPunct="1">
+      <a:defRPr sz="1200" kern="1200">
+        <a:solidFill>
+          <a:schemeClr val="tx1"/>
+        </a:solidFill>
+        <a:latin typeface="+mn-lt"/>
+        <a:ea typeface="+mn-ea"/>
+        <a:cs typeface="+mn-cs"/>
+      </a:defRPr>
+    </a:lvl9pPr>
+  </p:notesStyle>
+</p:notesMaster>
+</file>
+
+<file path=ppt/notesSlides/notesSlide1.xml><?xml version="1.0" encoding="utf-8"?>
+<p:notes xmlns:a="http://schemas.openxmlformats.org/drawingml/2006/main" xmlns:r="http://schemas.openxmlformats.org/officeDocument/2006/relationships" xmlns:p="http://schemas.openxmlformats.org/presentationml/2006/main">
+  <p:cSld>
+    <p:spTree>
+      <p:nvGrpSpPr>
+        <p:cNvPr id="1" name=""/>
+        <p:cNvGrpSpPr/>
+        <p:nvPr/>
+      </p:nvGrpSpPr>
+      <p:grpSpPr>
+        <a:xfrm>
+          <a:off x="0" y="0"/>
+          <a:ext cx="0" cy="0"/>
+          <a:chOff x="0" y="0"/>
+          <a:chExt cx="0" cy="0"/>
+        </a:xfrm>
+      </p:grpSpPr>
+      <p:sp>
+        <p:nvSpPr>
+          <p:cNvPr id="2" name="Slide Image Placeholder 1"/>
+          <p:cNvSpPr>
+            <a:spLocks noGrp="1" noRot="1" noChangeAspect="1"/>
+          </p:cNvSpPr>
+          <p:nvPr>
+            <p:ph type="sldImg"/>
+          </p:nvPr>
+        </p:nvSpPr>
+        <p:spPr/>
+      </p:sp>
+      <mc:AlternateContent xmlns:mc="http://schemas.openxmlformats.org/markup-compatibility/2006">
+        <mc:Choice xmlns:a14="http://schemas.microsoft.com/office/drawing/2010/main" Requires="a14">
+          <p:sp>
+            <p:nvSpPr>
+              <p:cNvPr id="3" name="Notes Placeholder 2"/>
+              <p:cNvSpPr>
+                <a:spLocks noGrp="1"/>
+              </p:cNvSpPr>
+              <p:nvPr>
+                <p:ph type="body" idx="1"/>
+              </p:nvPr>
+            </p:nvSpPr>
+            <p:spPr/>
+            <p:txBody>
+              <a:bodyPr/>
+              <a:lstStyle/>
+              <a:p>
+                <a:r>
+                  <a:rPr lang="en-US" sz="1200" b="0" i="0" kern="1200" dirty="0">
+                    <a:solidFill>
+                      <a:schemeClr val="tx1"/>
+                    </a:solidFill>
+                    <a:effectLst/>
+                    <a:latin typeface="+mn-lt"/>
+                    <a:ea typeface="+mn-ea"/>
+                    <a:cs typeface="+mn-cs"/>
+                  </a:rPr>
+                  <a:t>Alpha is the </a:t>
+                </a:r>
+                <a:r>
+                  <a:rPr lang="en-US" sz="1200" b="1" i="0" kern="1200" dirty="0">
+                    <a:solidFill>
+                      <a:schemeClr val="tx1"/>
+                    </a:solidFill>
+                    <a:effectLst/>
+                    <a:latin typeface="+mn-lt"/>
+                    <a:ea typeface="+mn-ea"/>
+                    <a:cs typeface="+mn-cs"/>
+                  </a:rPr>
+                  <a:t>per-step perturbation size</a:t>
+                </a:r>
+                <a:r>
+                  <a:rPr lang="en-US" sz="1200" b="0" i="0" kern="1200" dirty="0">
+                    <a:solidFill>
+                      <a:schemeClr val="tx1"/>
+                    </a:solidFill>
+                    <a:effectLst/>
+                    <a:latin typeface="+mn-lt"/>
+                    <a:ea typeface="+mn-ea"/>
+                    <a:cs typeface="+mn-cs"/>
+                  </a:rPr>
+                  <a:t> in the iterative attacks , think of it as the learning rate for the attack</a:t>
+                </a:r>
+              </a:p>
+              <a:p>
+                <a:r>
+                  <a:rPr lang="en-US" sz="1200" b="0" i="0" kern="1200" dirty="0">
+                    <a:solidFill>
+                      <a:schemeClr val="tx1"/>
+                    </a:solidFill>
+                    <a:effectLst/>
+                    <a:latin typeface="+mn-lt"/>
+                    <a:ea typeface="+mn-ea"/>
+                    <a:cs typeface="+mn-cs"/>
+                  </a:rPr>
+                  <a:t>Mu is momentum decay — 1.0 means full carry of all past gradients (no decay)</a:t>
+                </a:r>
+              </a:p>
+              <a:p>
+                <a:r>
+                  <a:rPr lang="en-US" sz="1200" b="0" i="0" kern="1200" dirty="0">
+                    <a:solidFill>
+                      <a:schemeClr val="tx1"/>
+                    </a:solidFill>
+                    <a:effectLst/>
+                    <a:latin typeface="+mn-lt"/>
+                    <a:ea typeface="+mn-ea"/>
+                    <a:cs typeface="+mn-cs"/>
+                  </a:rPr>
+                  <a:t>Without it (plain I-FGSM), every attack starts from the exact same point </a:t>
+                </a:r>
+                <a14:m>
+                  <m:oMath xmlns:m="http://schemas.openxmlformats.org/officeDocument/2006/math">
+                    <m:r>
+                      <a:rPr lang="en-US" sz="1200" i="1" kern="1200">
+                        <a:solidFill>
+                          <a:schemeClr val="tx1"/>
+                        </a:solidFill>
+                        <a:latin typeface="+mn-lt"/>
+                        <a:ea typeface="+mn-ea"/>
+                        <a:cs typeface="+mn-cs"/>
+                      </a:rPr>
+                      <m:t>𝑥</m:t>
+                    </m:r>
+                  </m:oMath>
+                </a14:m>
+                <a:r>
+                  <a:rPr lang="en-US" sz="1200" b="0" i="0" kern="1200" dirty="0">
+                    <a:solidFill>
+                      <a:schemeClr val="tx1"/>
+                    </a:solidFill>
+                    <a:effectLst/>
+                    <a:latin typeface="+mn-lt"/>
+                    <a:ea typeface="+mn-ea"/>
+                    <a:cs typeface="+mn-cs"/>
+                  </a:rPr>
+                  <a:t> and follows the same gradient — so it always finds the same local maximum of the loss. With random </a:t>
+                </a:r>
+                <a:r>
+                  <a:rPr lang="en-US" sz="1200" b="0" i="0" kern="1200" dirty="0" err="1">
+                    <a:solidFill>
+                      <a:schemeClr val="tx1"/>
+                    </a:solidFill>
+                    <a:effectLst/>
+                    <a:latin typeface="+mn-lt"/>
+                    <a:ea typeface="+mn-ea"/>
+                    <a:cs typeface="+mn-cs"/>
+                  </a:rPr>
+                  <a:t>initialisation</a:t>
+                </a:r>
+                <a:r>
+                  <a:rPr lang="en-US" sz="1200" b="0" i="0" kern="1200" dirty="0">
+                    <a:solidFill>
+                      <a:schemeClr val="tx1"/>
+                    </a:solidFill>
+                    <a:effectLst/>
+                    <a:latin typeface="+mn-lt"/>
+                    <a:ea typeface="+mn-ea"/>
+                    <a:cs typeface="+mn-cs"/>
+                  </a:rPr>
+                  <a:t>, each run starts from a different corner of the </a:t>
+                </a:r>
+                <a:r>
+                  <a:rPr lang="el-GR" sz="1200" b="0" i="0" kern="1200" dirty="0">
+                    <a:solidFill>
+                      <a:schemeClr val="tx1"/>
+                    </a:solidFill>
+                    <a:effectLst/>
+                    <a:latin typeface="+mn-lt"/>
+                    <a:ea typeface="+mn-ea"/>
+                    <a:cs typeface="+mn-cs"/>
+                  </a:rPr>
+                  <a:t>ε-</a:t>
+                </a:r>
+                <a:r>
+                  <a:rPr lang="en-US" sz="1200" b="0" i="0" kern="1200" dirty="0">
+                    <a:solidFill>
+                      <a:schemeClr val="tx1"/>
+                    </a:solidFill>
+                    <a:effectLst/>
+                    <a:latin typeface="+mn-lt"/>
+                    <a:ea typeface="+mn-ea"/>
+                    <a:cs typeface="+mn-cs"/>
+                  </a:rPr>
+                  <a:t>ball and explores a different path:</a:t>
+                </a:r>
+                <a:endParaRPr lang="en-US" dirty="0"/>
+              </a:p>
+            </p:txBody>
+          </p:sp>
+        </mc:Choice>
+        <mc:Fallback>
+          <p:sp>
+            <p:nvSpPr>
+              <p:cNvPr id="3" name="Notes Placeholder 2"/>
+              <p:cNvSpPr>
+                <a:spLocks noGrp="1"/>
+              </p:cNvSpPr>
+              <p:nvPr>
+                <p:ph type="body" idx="1"/>
+              </p:nvPr>
+            </p:nvSpPr>
+            <p:spPr/>
+            <p:txBody>
+              <a:bodyPr/>
+              <a:lstStyle/>
+              <a:p>
+                <a:r>
+                  <a:rPr lang="en-US" sz="1200" b="0" i="0" kern="1200" dirty="0">
+                    <a:solidFill>
+                      <a:schemeClr val="tx1"/>
+                    </a:solidFill>
+                    <a:effectLst/>
+                    <a:latin typeface="+mn-lt"/>
+                    <a:ea typeface="+mn-ea"/>
+                    <a:cs typeface="+mn-cs"/>
+                  </a:rPr>
+                  <a:t>Alpha is the </a:t>
+                </a:r>
+                <a:r>
+                  <a:rPr lang="en-US" sz="1200" b="1" i="0" kern="1200" dirty="0">
+                    <a:solidFill>
+                      <a:schemeClr val="tx1"/>
+                    </a:solidFill>
+                    <a:effectLst/>
+                    <a:latin typeface="+mn-lt"/>
+                    <a:ea typeface="+mn-ea"/>
+                    <a:cs typeface="+mn-cs"/>
+                  </a:rPr>
+                  <a:t>per-step perturbation size</a:t>
+                </a:r>
+                <a:r>
+                  <a:rPr lang="en-US" sz="1200" b="0" i="0" kern="1200" dirty="0">
+                    <a:solidFill>
+                      <a:schemeClr val="tx1"/>
+                    </a:solidFill>
+                    <a:effectLst/>
+                    <a:latin typeface="+mn-lt"/>
+                    <a:ea typeface="+mn-ea"/>
+                    <a:cs typeface="+mn-cs"/>
+                  </a:rPr>
+                  <a:t> in the iterative attacks , think of it as the learning rate for the attack</a:t>
+                </a:r>
+              </a:p>
+              <a:p>
+                <a:r>
+                  <a:rPr lang="en-US" sz="1200" b="0" i="0" kern="1200" dirty="0">
+                    <a:solidFill>
+                      <a:schemeClr val="tx1"/>
+                    </a:solidFill>
+                    <a:effectLst/>
+                    <a:latin typeface="+mn-lt"/>
+                    <a:ea typeface="+mn-ea"/>
+                    <a:cs typeface="+mn-cs"/>
+                  </a:rPr>
+                  <a:t>Mu is momentum decay — 1.0 means full carry of all past gradients (no decay)</a:t>
+                </a:r>
+              </a:p>
+              <a:p>
+                <a:r>
+                  <a:rPr lang="en-US" sz="1200" b="0" i="0" kern="1200" dirty="0">
+                    <a:solidFill>
+                      <a:schemeClr val="tx1"/>
+                    </a:solidFill>
+                    <a:effectLst/>
+                    <a:latin typeface="+mn-lt"/>
+                    <a:ea typeface="+mn-ea"/>
+                    <a:cs typeface="+mn-cs"/>
+                  </a:rPr>
+                  <a:t>Without it (plain I-FGSM), every attack starts from the exact same point </a:t>
+                </a:r>
+                <a:r>
+                  <a:rPr lang="en-US" sz="1200" i="0" kern="1200">
+                    <a:solidFill>
+                      <a:schemeClr val="tx1"/>
+                    </a:solidFill>
+                    <a:latin typeface="+mn-lt"/>
+                    <a:ea typeface="+mn-ea"/>
+                    <a:cs typeface="+mn-cs"/>
+                  </a:rPr>
+                  <a:t>𝑥</a:t>
+                </a:r>
+                <a:r>
+                  <a:rPr lang="en-US" sz="1200" b="0" i="0" kern="1200" dirty="0">
+                    <a:solidFill>
+                      <a:schemeClr val="tx1"/>
+                    </a:solidFill>
+                    <a:effectLst/>
+                    <a:latin typeface="+mn-lt"/>
+                    <a:ea typeface="+mn-ea"/>
+                    <a:cs typeface="+mn-cs"/>
+                  </a:rPr>
+                  <a:t> and follows the same gradient — so it always finds the same local maximum of the loss. With random </a:t>
+                </a:r>
+                <a:r>
+                  <a:rPr lang="en-US" sz="1200" b="0" i="0" kern="1200" dirty="0" err="1">
+                    <a:solidFill>
+                      <a:schemeClr val="tx1"/>
+                    </a:solidFill>
+                    <a:effectLst/>
+                    <a:latin typeface="+mn-lt"/>
+                    <a:ea typeface="+mn-ea"/>
+                    <a:cs typeface="+mn-cs"/>
+                  </a:rPr>
+                  <a:t>initialisation</a:t>
+                </a:r>
+                <a:r>
+                  <a:rPr lang="en-US" sz="1200" b="0" i="0" kern="1200" dirty="0">
+                    <a:solidFill>
+                      <a:schemeClr val="tx1"/>
+                    </a:solidFill>
+                    <a:effectLst/>
+                    <a:latin typeface="+mn-lt"/>
+                    <a:ea typeface="+mn-ea"/>
+                    <a:cs typeface="+mn-cs"/>
+                  </a:rPr>
+                  <a:t>, each run starts from a different corner of the </a:t>
+                </a:r>
+                <a:r>
+                  <a:rPr lang="el-GR" sz="1200" b="0" i="0" kern="1200" dirty="0">
+                    <a:solidFill>
+                      <a:schemeClr val="tx1"/>
+                    </a:solidFill>
+                    <a:effectLst/>
+                    <a:latin typeface="+mn-lt"/>
+                    <a:ea typeface="+mn-ea"/>
+                    <a:cs typeface="+mn-cs"/>
+                  </a:rPr>
+                  <a:t>ε-</a:t>
+                </a:r>
+                <a:r>
+                  <a:rPr lang="en-US" sz="1200" b="0" i="0" kern="1200" dirty="0">
+                    <a:solidFill>
+                      <a:schemeClr val="tx1"/>
+                    </a:solidFill>
+                    <a:effectLst/>
+                    <a:latin typeface="+mn-lt"/>
+                    <a:ea typeface="+mn-ea"/>
+                    <a:cs typeface="+mn-cs"/>
+                  </a:rPr>
+                  <a:t>ball and explores a different path:</a:t>
+                </a:r>
+                <a:endParaRPr lang="en-US" dirty="0"/>
+              </a:p>
+            </p:txBody>
+          </p:sp>
+        </mc:Fallback>
+      </mc:AlternateContent>
+      <p:sp>
+        <p:nvSpPr>
+          <p:cNvPr id="4" name="Slide Number Placeholder 3"/>
+          <p:cNvSpPr>
+            <a:spLocks noGrp="1"/>
+          </p:cNvSpPr>
+          <p:nvPr>
+            <p:ph type="sldNum" sz="quarter" idx="5"/>
+          </p:nvPr>
+        </p:nvSpPr>
+        <p:spPr/>
+        <p:txBody>
+          <a:bodyPr/>
+          <a:lstStyle/>
+          <a:p>
+            <a:fld id="{1270B60B-44A9-7F47-8298-E0EB77EACFE7}" type="slidenum">
+              <a:rPr lang="en-US" smtClean="0"/>
+              <a:t>3</a:t>
+            </a:fld>
+            <a:endParaRPr lang="en-US"/>
+          </a:p>
+        </p:txBody>
+      </p:sp>
+    </p:spTree>
+    <p:extLst>
+      <p:ext uri="{BB962C8B-B14F-4D97-AF65-F5344CB8AC3E}">
+        <p14:creationId xmlns:p14="http://schemas.microsoft.com/office/powerpoint/2010/main" val="2226145391"/>
+      </p:ext>
+    </p:extLst>
+  </p:cSld>
+  <p:clrMapOvr>
+    <a:masterClrMapping/>
+  </p:clrMapOvr>
+</p:notes>
+</file>
+
+<file path=ppt/notesSlides/notesSlide2.xml><?xml version="1.0" encoding="utf-8"?>
+<p:notes xmlns:a="http://schemas.openxmlformats.org/drawingml/2006/main" xmlns:r="http://schemas.openxmlformats.org/officeDocument/2006/relationships" xmlns:p="http://schemas.openxmlformats.org/presentationml/2006/main">
+  <p:cSld>
+    <p:spTree>
+      <p:nvGrpSpPr>
+        <p:cNvPr id="1" name="">
+          <a:extLst>
+            <a:ext uri="{FF2B5EF4-FFF2-40B4-BE49-F238E27FC236}">
+              <a16:creationId xmlns:a16="http://schemas.microsoft.com/office/drawing/2014/main" id="{AF27C3B8-4ABC-39CB-BF78-F3E35065F521}"/>
+            </a:ext>
+          </a:extLst>
+        </p:cNvPr>
+        <p:cNvGrpSpPr/>
+        <p:nvPr/>
+      </p:nvGrpSpPr>
+      <p:grpSpPr>
+        <a:xfrm>
+          <a:off x="0" y="0"/>
+          <a:ext cx="0" cy="0"/>
+          <a:chOff x="0" y="0"/>
+          <a:chExt cx="0" cy="0"/>
+        </a:xfrm>
+      </p:grpSpPr>
+      <p:sp>
+        <p:nvSpPr>
+          <p:cNvPr id="2" name="Slide Image Placeholder 1">
+            <a:extLst>
+              <a:ext uri="{FF2B5EF4-FFF2-40B4-BE49-F238E27FC236}">
+                <a16:creationId xmlns:a16="http://schemas.microsoft.com/office/drawing/2014/main" id="{1FA72B47-9F21-1D1A-479F-C88DC3A2E38F}"/>
+              </a:ext>
+            </a:extLst>
+          </p:cNvPr>
+          <p:cNvSpPr>
+            <a:spLocks noGrp="1" noRot="1" noChangeAspect="1"/>
+          </p:cNvSpPr>
+          <p:nvPr>
+            <p:ph type="sldImg"/>
+          </p:nvPr>
+        </p:nvSpPr>
+        <p:spPr/>
+      </p:sp>
+      <p:sp>
+        <p:nvSpPr>
+          <p:cNvPr id="3" name="Notes Placeholder 2">
+            <a:extLst>
+              <a:ext uri="{FF2B5EF4-FFF2-40B4-BE49-F238E27FC236}">
+                <a16:creationId xmlns:a16="http://schemas.microsoft.com/office/drawing/2014/main" id="{C96A854D-E5D3-AA92-51DF-F0798CD1385E}"/>
+              </a:ext>
+            </a:extLst>
+          </p:cNvPr>
+          <p:cNvSpPr>
+            <a:spLocks noGrp="1"/>
+          </p:cNvSpPr>
+          <p:nvPr>
+            <p:ph type="body" idx="1"/>
+          </p:nvPr>
+        </p:nvSpPr>
+        <p:spPr/>
+        <p:txBody>
+          <a:bodyPr/>
+          <a:lstStyle/>
+          <a:p>
+            <a:endParaRPr lang="en-US" dirty="0"/>
+          </a:p>
+        </p:txBody>
+      </p:sp>
+      <p:sp>
+        <p:nvSpPr>
+          <p:cNvPr id="4" name="Slide Number Placeholder 3">
+            <a:extLst>
+              <a:ext uri="{FF2B5EF4-FFF2-40B4-BE49-F238E27FC236}">
+                <a16:creationId xmlns:a16="http://schemas.microsoft.com/office/drawing/2014/main" id="{D94A15A6-5CC6-66FD-1565-3C5576FAD60A}"/>
+              </a:ext>
+            </a:extLst>
+          </p:cNvPr>
+          <p:cNvSpPr>
+            <a:spLocks noGrp="1"/>
+          </p:cNvSpPr>
+          <p:nvPr>
+            <p:ph type="sldNum" sz="quarter" idx="5"/>
+          </p:nvPr>
+        </p:nvSpPr>
+        <p:spPr/>
+        <p:txBody>
+          <a:bodyPr/>
+          <a:lstStyle/>
+          <a:p>
+            <a:fld id="{1270B60B-44A9-7F47-8298-E0EB77EACFE7}" type="slidenum">
+              <a:rPr lang="en-US" smtClean="0"/>
+              <a:t>4</a:t>
+            </a:fld>
+            <a:endParaRPr lang="en-US"/>
+          </a:p>
+        </p:txBody>
+      </p:sp>
+    </p:spTree>
+    <p:extLst>
+      <p:ext uri="{BB962C8B-B14F-4D97-AF65-F5344CB8AC3E}">
+        <p14:creationId xmlns:p14="http://schemas.microsoft.com/office/powerpoint/2010/main" val="3166458105"/>
+      </p:ext>
+    </p:extLst>
+  </p:cSld>
+  <p:clrMapOvr>
+    <a:masterClrMapping/>
+  </p:clrMapOvr>
+</p:notes>
 </file>
 
 <file path=ppt/slideLayouts/slideLayout1.xml><?xml version="1.0" encoding="utf-8"?>
@@ -8238,7 +9081,7 @@
                   <a:srgbClr val="00C2FF"/>
                 </a:solidFill>
               </a:rPr>
-              <a:t>Comparing Attack Methods</a:t>
+              <a:t>Comparing Different Attack Methods on CNN Model</a:t>
             </a:r>
           </a:p>
         </p:txBody>
@@ -8277,7 +9120,7 @@
         <p:spPr>
           <a:xfrm>
             <a:off x="457200" y="164592"/>
-            <a:ext cx="10972800" cy="685800"/>
+            <a:ext cx="10972800" cy="553998"/>
           </a:xfrm>
           <a:prstGeom prst="rect">
             <a:avLst/>
@@ -8297,7 +9140,23 @@
                   <a:srgbClr val="00C2FF"/>
                 </a:solidFill>
               </a:rPr>
-              <a:t>Target Model — CNN (Trained Once, Then Attacked)</a:t>
+              <a:t>Target Model — CNN (</a:t>
+            </a:r>
+            <a:r>
+              <a:rPr lang="en-US" sz="3000" b="1" i="0" dirty="0">
+                <a:solidFill>
+                  <a:srgbClr val="00C2FF"/>
+                </a:solidFill>
+              </a:rPr>
+              <a:t>Best Model Trained Before</a:t>
+            </a:r>
+            <a:r>
+              <a:rPr sz="3000" b="1" i="0" dirty="0">
+                <a:solidFill>
+                  <a:srgbClr val="00C2FF"/>
+                </a:solidFill>
+              </a:rPr>
+              <a:t>)</a:t>
             </a:r>
           </a:p>
         </p:txBody>
@@ -8311,7 +9170,7 @@
         <p:spPr>
           <a:xfrm>
             <a:off x="457200" y="1097280"/>
-            <a:ext cx="11247120" cy="1828800"/>
+            <a:ext cx="11247120" cy="1738938"/>
           </a:xfrm>
           <a:prstGeom prst="rect">
             <a:avLst/>
@@ -8325,14 +9184,11 @@
           <a:lstStyle/>
           <a:p>
             <a:pPr algn="l"/>
-            <a:r>
-              <a:rPr sz="2100" b="1" dirty="0">
-                <a:solidFill>
-                  <a:srgbClr val="00C2FF"/>
-                </a:solidFill>
-              </a:rPr>
-              <a:t>Setup</a:t>
-            </a:r>
+            <a:endParaRPr sz="2100" b="1" dirty="0">
+              <a:solidFill>
+                <a:srgbClr val="00C2FF"/>
+              </a:solidFill>
+            </a:endParaRPr>
           </a:p>
           <a:p>
             <a:pPr algn="l">
@@ -9182,211 +10038,6 @@
       </p:grpSpPr>
       <p:sp>
         <p:nvSpPr>
-          <p:cNvPr id="5" name="TextBox 4">
-            <a:extLst>
-              <a:ext uri="{FF2B5EF4-FFF2-40B4-BE49-F238E27FC236}">
-                <a16:creationId xmlns:a16="http://schemas.microsoft.com/office/drawing/2014/main" id="{ECCDDE6C-5E65-1065-D73E-54A84BA53026}"/>
-              </a:ext>
-            </a:extLst>
-          </p:cNvPr>
-          <p:cNvSpPr txBox="1"/>
-          <p:nvPr/>
-        </p:nvSpPr>
-        <p:spPr>
-          <a:xfrm>
-            <a:off x="457200" y="1777504"/>
-            <a:ext cx="11247120" cy="2862322"/>
-          </a:xfrm>
-          <a:prstGeom prst="rect">
-            <a:avLst/>
-          </a:prstGeom>
-          <a:noFill/>
-        </p:spPr>
-        <p:txBody>
-          <a:bodyPr wrap="square">
-            <a:spAutoFit/>
-          </a:bodyPr>
-          <a:lstStyle/>
-          <a:p>
-            <a:r>
-              <a:rPr lang="en-US" dirty="0"/>
-              <a:t>We attack the trained CNN model using following three gradient-based adversarial attacks to evaluate the robustness of the model.</a:t>
-            </a:r>
-          </a:p>
-          <a:p>
-            <a:endParaRPr lang="en-US" dirty="0"/>
-          </a:p>
-          <a:p>
-            <a:endParaRPr lang="en-US" dirty="0"/>
-          </a:p>
-          <a:p>
-            <a:endParaRPr lang="en-US" dirty="0"/>
-          </a:p>
-          <a:p>
-            <a:endParaRPr lang="en-US" dirty="0"/>
-          </a:p>
-          <a:p>
-            <a:endParaRPr lang="en-US" dirty="0"/>
-          </a:p>
-          <a:p>
-            <a:endParaRPr lang="en-US" dirty="0"/>
-          </a:p>
-          <a:p>
-            <a:r>
-              <a:rPr lang="en-US" dirty="0"/>
-              <a:t>We use following metrics to evaluate attack.</a:t>
-            </a:r>
-          </a:p>
-          <a:p>
-            <a:endParaRPr lang="en-US" dirty="0"/>
-          </a:p>
-        </p:txBody>
-      </p:sp>
-      <p:pic>
-        <p:nvPicPr>
-          <p:cNvPr id="7" name="Picture 6" descr="A black screen with white text&#10;&#10;AI-generated content may be incorrect.">
-            <a:extLst>
-              <a:ext uri="{FF2B5EF4-FFF2-40B4-BE49-F238E27FC236}">
-                <a16:creationId xmlns:a16="http://schemas.microsoft.com/office/drawing/2014/main" id="{8F8C0415-89F9-2FBC-BB55-9967D7C23AAC}"/>
-              </a:ext>
-            </a:extLst>
-          </p:cNvPr>
-          <p:cNvPicPr>
-            <a:picLocks noChangeAspect="1"/>
-          </p:cNvPicPr>
-          <p:nvPr/>
-        </p:nvPicPr>
-        <p:blipFill>
-          <a:blip r:embed="rId2"/>
-          <a:stretch>
-            <a:fillRect/>
-          </a:stretch>
-        </p:blipFill>
-        <p:spPr>
-          <a:xfrm>
-            <a:off x="3482831" y="2196206"/>
-            <a:ext cx="6049097" cy="1684403"/>
-          </a:xfrm>
-          <a:prstGeom prst="rect">
-            <a:avLst/>
-          </a:prstGeom>
-        </p:spPr>
-      </p:pic>
-      <p:pic>
-        <p:nvPicPr>
-          <p:cNvPr id="9" name="Picture 8" descr="A black and white screen with white text&#10;&#10;AI-generated content may be incorrect.">
-            <a:extLst>
-              <a:ext uri="{FF2B5EF4-FFF2-40B4-BE49-F238E27FC236}">
-                <a16:creationId xmlns:a16="http://schemas.microsoft.com/office/drawing/2014/main" id="{4BEDD2CE-AD53-6ED1-41D0-28B67A55EE93}"/>
-              </a:ext>
-            </a:extLst>
-          </p:cNvPr>
-          <p:cNvPicPr>
-            <a:picLocks noChangeAspect="1"/>
-          </p:cNvPicPr>
-          <p:nvPr/>
-        </p:nvPicPr>
-        <p:blipFill>
-          <a:blip r:embed="rId3"/>
-          <a:stretch>
-            <a:fillRect/>
-          </a:stretch>
-        </p:blipFill>
-        <p:spPr>
-          <a:xfrm>
-            <a:off x="2208212" y="4639826"/>
-            <a:ext cx="8594896" cy="1359192"/>
-          </a:xfrm>
-          <a:prstGeom prst="rect">
-            <a:avLst/>
-          </a:prstGeom>
-        </p:spPr>
-      </p:pic>
-      <p:sp>
-        <p:nvSpPr>
-          <p:cNvPr id="10" name="TextBox 9">
-            <a:extLst>
-              <a:ext uri="{FF2B5EF4-FFF2-40B4-BE49-F238E27FC236}">
-                <a16:creationId xmlns:a16="http://schemas.microsoft.com/office/drawing/2014/main" id="{2D42ADE0-175A-6D0C-BB89-679684CBDC13}"/>
-              </a:ext>
-            </a:extLst>
-          </p:cNvPr>
-          <p:cNvSpPr txBox="1"/>
-          <p:nvPr/>
-        </p:nvSpPr>
-        <p:spPr>
-          <a:xfrm>
-            <a:off x="457200" y="164592"/>
-            <a:ext cx="10972800" cy="553998"/>
-          </a:xfrm>
-          <a:prstGeom prst="rect">
-            <a:avLst/>
-          </a:prstGeom>
-          <a:noFill/>
-        </p:spPr>
-        <p:txBody>
-          <a:bodyPr wrap="square">
-            <a:spAutoFit/>
-          </a:bodyPr>
-          <a:lstStyle/>
-          <a:p>
-            <a:pPr algn="l"/>
-            <a:r>
-              <a:rPr lang="en-US" sz="3000" b="1" dirty="0">
-                <a:solidFill>
-                  <a:srgbClr val="00C2FF"/>
-                </a:solidFill>
-              </a:rPr>
-              <a:t>Attack Methods and Metrics for </a:t>
-            </a:r>
-            <a:r>
-              <a:rPr lang="en-US" sz="3000" b="1" dirty="0" err="1">
-                <a:solidFill>
-                  <a:srgbClr val="00C2FF"/>
-                </a:solidFill>
-              </a:rPr>
-              <a:t>Evaulation</a:t>
-            </a:r>
-            <a:endParaRPr sz="3000" b="1" i="0" dirty="0">
-              <a:solidFill>
-                <a:srgbClr val="00C2FF"/>
-              </a:solidFill>
-            </a:endParaRPr>
-          </a:p>
-        </p:txBody>
-      </p:sp>
-    </p:spTree>
-    <p:extLst>
-      <p:ext uri="{BB962C8B-B14F-4D97-AF65-F5344CB8AC3E}">
-        <p14:creationId xmlns:p14="http://schemas.microsoft.com/office/powerpoint/2010/main" val="895351945"/>
-      </p:ext>
-    </p:extLst>
-  </p:cSld>
-  <p:clrMapOvr>
-    <a:masterClrMapping/>
-  </p:clrMapOvr>
-</p:sld>
-</file>
-
-<file path=ppt/slides/slide4.xml><?xml version="1.0" encoding="utf-8"?>
-<p:sld xmlns:a="http://schemas.openxmlformats.org/drawingml/2006/main" xmlns:r="http://schemas.openxmlformats.org/officeDocument/2006/relationships" xmlns:p="http://schemas.openxmlformats.org/presentationml/2006/main">
-  <p:cSld>
-    <p:spTree>
-      <p:nvGrpSpPr>
-        <p:cNvPr id="1" name=""/>
-        <p:cNvGrpSpPr/>
-        <p:nvPr/>
-      </p:nvGrpSpPr>
-      <p:grpSpPr>
-        <a:xfrm>
-          <a:off x="0" y="0"/>
-          <a:ext cx="0" cy="0"/>
-          <a:chOff x="0" y="0"/>
-          <a:chExt cx="0" cy="0"/>
-        </a:xfrm>
-      </p:grpSpPr>
-      <p:sp>
-        <p:nvSpPr>
           <p:cNvPr id="4" name="TextBox 3"/>
           <p:cNvSpPr txBox="1"/>
           <p:nvPr/>
@@ -9540,7 +10191,7 @@
         <p:spPr>
           <a:xfrm>
             <a:off x="594360" y="2240280"/>
-            <a:ext cx="3383280" cy="3474720"/>
+            <a:ext cx="3383280" cy="3123932"/>
           </a:xfrm>
           <a:prstGeom prst="rect">
             <a:avLst/>
@@ -9552,97 +10203,109 @@
             <a:spAutoFit/>
           </a:bodyPr>
           <a:lstStyle/>
+          <a:p>
+            <a:pPr marL="285750" indent="-285750" algn="l">
+              <a:spcBef>
+                <a:spcPts val="300"/>
+              </a:spcBef>
+              <a:buFont typeface="Arial" panose="020B0604020202020204" pitchFamily="34" charset="0"/>
+              <a:buChar char="•"/>
+            </a:pPr>
+            <a:r>
+              <a:rPr lang="en-US" sz="1700" dirty="0">
+                <a:solidFill>
+                  <a:srgbClr val="CCE5FF"/>
+                </a:solidFill>
+              </a:rPr>
+              <a:t>FGSM is a one-step adversarial attack designed for </a:t>
+            </a:r>
+            <a:r>
+              <a:rPr lang="en-US" sz="1700" b="1" dirty="0">
+                <a:solidFill>
+                  <a:srgbClr val="CCE5FF"/>
+                </a:solidFill>
+              </a:rPr>
+              <a:t>speed</a:t>
+            </a:r>
+            <a:r>
+              <a:rPr lang="en-US" sz="1700" dirty="0">
+                <a:solidFill>
+                  <a:srgbClr val="CCE5FF"/>
+                </a:solidFill>
+              </a:rPr>
+              <a:t>. It computes the gradient of the loss function with respect to the input image just once and moves the pixels a fixed step size in the direction that increases the loss.</a:t>
+            </a:r>
+          </a:p>
+          <a:p>
+            <a:pPr marL="285750" indent="-285750">
+              <a:spcBef>
+                <a:spcPts val="300"/>
+              </a:spcBef>
+              <a:buFont typeface="Arial" panose="020B0604020202020204" pitchFamily="34" charset="0"/>
+              <a:buChar char="•"/>
+            </a:pPr>
+            <a:r>
+              <a:rPr lang="en-US" sz="1700" dirty="0">
+                <a:solidFill>
+                  <a:srgbClr val="CCE5FF"/>
+                </a:solidFill>
+              </a:rPr>
+              <a:t>Hyperparameter: </a:t>
+            </a:r>
+          </a:p>
+          <a:p>
+            <a:pPr marL="742950" lvl="1" indent="-285750">
+              <a:spcBef>
+                <a:spcPts val="300"/>
+              </a:spcBef>
+              <a:buFont typeface="Arial" panose="020B0604020202020204" pitchFamily="34" charset="0"/>
+              <a:buChar char="•"/>
+            </a:pPr>
+            <a:r>
+              <a:rPr lang="en-US" sz="1700" dirty="0">
+                <a:solidFill>
+                  <a:srgbClr val="CCE5FF"/>
+                </a:solidFill>
+              </a:rPr>
+              <a:t>Single step</a:t>
+            </a:r>
+          </a:p>
+          <a:p>
+            <a:pPr marL="742950" lvl="1" indent="-285750">
+              <a:spcBef>
+                <a:spcPts val="300"/>
+              </a:spcBef>
+              <a:buFont typeface="Arial" panose="020B0604020202020204" pitchFamily="34" charset="0"/>
+              <a:buChar char="•"/>
+            </a:pPr>
+            <a:r>
+              <a:rPr lang="el-GR" sz="1700" dirty="0">
+                <a:solidFill>
+                  <a:srgbClr val="CCE5FF"/>
+                </a:solidFill>
+              </a:rPr>
+              <a:t>α = 0.</a:t>
+            </a:r>
+            <a:r>
+              <a:rPr lang="en-US" sz="1700" dirty="0">
+                <a:solidFill>
+                  <a:srgbClr val="CCE5FF"/>
+                </a:solidFill>
+              </a:rPr>
+              <a:t>3</a:t>
+            </a:r>
+          </a:p>
           <a:p>
             <a:pPr algn="l">
               <a:spcBef>
                 <a:spcPts val="300"/>
               </a:spcBef>
             </a:pPr>
-            <a:r>
-              <a:rPr sz="1700" dirty="0">
-                <a:solidFill>
-                  <a:srgbClr val="CCE5FF"/>
-                </a:solidFill>
-              </a:rPr>
-              <a:t>•  ASR: 32.6%  — weakest of three</a:t>
-            </a:r>
-          </a:p>
-          <a:p>
-            <a:pPr algn="l">
-              <a:spcBef>
-                <a:spcPts val="300"/>
-              </a:spcBef>
-            </a:pPr>
-            <a:r>
-              <a:rPr sz="1700" dirty="0">
-                <a:solidFill>
-                  <a:srgbClr val="CCE5FF"/>
-                </a:solidFill>
-              </a:rPr>
-              <a:t>•  One-step attack — fastest to compute</a:t>
-            </a:r>
-          </a:p>
-          <a:p>
-            <a:pPr algn="l">
-              <a:spcBef>
-                <a:spcPts val="300"/>
-              </a:spcBef>
-            </a:pPr>
-            <a:r>
-              <a:rPr sz="1700" dirty="0">
-                <a:solidFill>
-                  <a:srgbClr val="CCE5FF"/>
-                </a:solidFill>
-              </a:rPr>
-              <a:t>•  </a:t>
-            </a:r>
-            <a:r>
-              <a:rPr sz="1700" dirty="0" err="1">
-                <a:solidFill>
-                  <a:srgbClr val="CCE5FF"/>
-                </a:solidFill>
-              </a:rPr>
-              <a:t>x_adv</a:t>
-            </a:r>
-            <a:r>
-              <a:rPr sz="1700" dirty="0">
-                <a:solidFill>
-                  <a:srgbClr val="CCE5FF"/>
-                </a:solidFill>
-              </a:rPr>
-              <a:t> = x + </a:t>
-            </a:r>
-            <a:r>
-              <a:rPr sz="1700" dirty="0" err="1">
-                <a:solidFill>
-                  <a:srgbClr val="CCE5FF"/>
-                </a:solidFill>
-              </a:rPr>
-              <a:t>ε</a:t>
-            </a:r>
-            <a:r>
-              <a:rPr sz="1700" dirty="0">
-                <a:solidFill>
-                  <a:srgbClr val="CCE5FF"/>
-                </a:solidFill>
-              </a:rPr>
-              <a:t> · sign(∇ₓ L(f(x), y))</a:t>
-            </a:r>
-          </a:p>
-          <a:p>
-            <a:pPr algn="l">
-              <a:spcBef>
-                <a:spcPts val="300"/>
-              </a:spcBef>
-            </a:pPr>
-            <a:r>
-              <a:rPr sz="1700" dirty="0">
-                <a:solidFill>
-                  <a:srgbClr val="CCE5FF"/>
-                </a:solidFill>
-              </a:rPr>
-              <a:t>•  Single gradient call — budget not fully exploited</a:t>
-            </a:r>
+            <a:endParaRPr sz="1700" dirty="0">
+              <a:solidFill>
+                <a:srgbClr val="CCE5FF"/>
+              </a:solidFill>
+            </a:endParaRPr>
           </a:p>
         </p:txBody>
       </p:sp>
@@ -9767,7 +10430,7 @@
         <p:spPr>
           <a:xfrm>
             <a:off x="4389120" y="2240280"/>
-            <a:ext cx="3383280" cy="2039020"/>
+            <a:ext cx="3383280" cy="2862322"/>
           </a:xfrm>
           <a:prstGeom prst="rect">
             <a:avLst/>
@@ -9791,11 +10454,19 @@
                   <a:srgbClr val="CCE5FF"/>
                 </a:solidFill>
               </a:rPr>
-              <a:t>• ASR: 70.8%  — strongest ★</a:t>
-            </a:r>
-          </a:p>
-          <a:p>
-            <a:pPr algn="l">
+              <a:t>• </a:t>
+            </a:r>
+            <a:r>
+              <a:rPr lang="en-US" sz="1700" dirty="0">
+                <a:solidFill>
+                  <a:srgbClr val="CCE5FF"/>
+                </a:solidFill>
+              </a:rPr>
+              <a:t>I-FGSM and PGD improve upon FGSM by applying the gradient step iteratively over multiple small steps. PGD adds a random initialization step to explore a wider space.</a:t>
+            </a:r>
+          </a:p>
+          <a:p>
+            <a:pPr>
               <a:spcBef>
                 <a:spcPts val="300"/>
               </a:spcBef>
@@ -9806,27 +10477,46 @@
                   <a:srgbClr val="CCE5FF"/>
                 </a:solidFill>
               </a:rPr>
-              <a:t>•  50 steps  (α = 0.01), random ℓ∞ </a:t>
-            </a:r>
-            <a:r>
-              <a:rPr sz="1700" dirty="0" err="1">
+              <a:t>•  </a:t>
+            </a:r>
+            <a:r>
+              <a:rPr lang="en-US" sz="1700" dirty="0">
                 <a:solidFill>
                   <a:srgbClr val="CCE5FF"/>
                 </a:solidFill>
               </a:rPr>
-              <a:t>initialisation</a:t>
-            </a:r>
-            <a:endParaRPr sz="1700" dirty="0">
+              <a:t>Hyperparameter: </a:t>
+            </a:r>
+          </a:p>
+          <a:p>
+            <a:pPr marL="742950" lvl="1" indent="-285750">
+              <a:spcBef>
+                <a:spcPts val="300"/>
+              </a:spcBef>
+              <a:buFont typeface="Arial" panose="020B0604020202020204" pitchFamily="34" charset="0"/>
+              <a:buChar char="•"/>
+            </a:pPr>
+            <a:r>
+              <a:rPr sz="1700" dirty="0">
+                <a:solidFill>
+                  <a:srgbClr val="CCE5FF"/>
+                </a:solidFill>
+              </a:rPr>
+              <a:t>50 steps  </a:t>
+            </a:r>
+            <a:endParaRPr lang="en-US" sz="1700" dirty="0">
               <a:solidFill>
                 <a:srgbClr val="CCE5FF"/>
               </a:solidFill>
             </a:endParaRPr>
           </a:p>
           <a:p>
-            <a:pPr algn="l">
+            <a:pPr marL="742950" lvl="1" indent="-285750">
               <a:spcBef>
                 <a:spcPts val="300"/>
               </a:spcBef>
+              <a:buFont typeface="Arial" panose="020B0604020202020204" pitchFamily="34" charset="0"/>
+              <a:buChar char="•"/>
             </a:pPr>
             <a:r>
               <a:rPr sz="1700" dirty="0">
@@ -9834,30 +10524,24 @@
                   <a:srgbClr val="CCE5FF"/>
                 </a:solidFill>
               </a:rPr>
-              <a:t>•  Projects back to </a:t>
-            </a:r>
-            <a:r>
-              <a:rPr sz="1700" dirty="0" err="1">
+              <a:t>α = 0.01</a:t>
+            </a:r>
+            <a:r>
+              <a:rPr lang="en-US" sz="1700" dirty="0">
                 <a:solidFill>
                   <a:srgbClr val="CCE5FF"/>
                 </a:solidFill>
               </a:rPr>
-              <a:t>ε</a:t>
-            </a:r>
-            <a:r>
-              <a:rPr sz="1700" dirty="0">
-                <a:solidFill>
-                  <a:srgbClr val="CCE5FF"/>
-                </a:solidFill>
-              </a:rPr>
-              <a:t>-ball after every step</a:t>
-            </a:r>
-          </a:p>
-          <a:p>
-            <a:pPr algn="l">
+              <a:t> per-step perturbation size </a:t>
+            </a:r>
+          </a:p>
+          <a:p>
+            <a:pPr marL="742950" lvl="1" indent="-285750">
               <a:spcBef>
                 <a:spcPts val="300"/>
               </a:spcBef>
+              <a:buFont typeface="Arial" panose="020B0604020202020204" pitchFamily="34" charset="0"/>
+              <a:buChar char="•"/>
             </a:pPr>
             <a:r>
               <a:rPr sz="1700" dirty="0">
@@ -9865,7 +10549,23 @@
                   <a:srgbClr val="CCE5FF"/>
                 </a:solidFill>
               </a:rPr>
-              <a:t>•  Fully exploits the perturbation budget</a:t>
+              <a:t>random ℓ∞ initiali</a:t>
+            </a:r>
+            <a:r>
+              <a:rPr lang="en-US" sz="1700" dirty="0">
+                <a:solidFill>
+                  <a:srgbClr val="CCE5FF"/>
+                </a:solidFill>
+              </a:rPr>
+              <a:t>za</a:t>
+            </a:r>
+            <a:r>
+              <a:rPr sz="1700" dirty="0">
+                <a:solidFill>
+                  <a:srgbClr val="CCE5FF"/>
+                </a:solidFill>
+              </a:rPr>
+              <a:t>tion</a:t>
             </a:r>
           </a:p>
         </p:txBody>
@@ -9991,7 +10691,7 @@
         <p:spPr>
           <a:xfrm>
             <a:off x="8183880" y="2240280"/>
-            <a:ext cx="3383280" cy="3474720"/>
+            <a:ext cx="3657600" cy="3385542"/>
           </a:xfrm>
           <a:prstGeom prst="rect">
             <a:avLst/>
@@ -10004,68 +10704,512 @@
           </a:bodyPr>
           <a:lstStyle/>
           <a:p>
-            <a:pPr algn="l">
+            <a:pPr marL="285750" indent="-285750">
               <a:spcBef>
                 <a:spcPts val="300"/>
               </a:spcBef>
+              <a:buFont typeface="Arial" panose="020B0604020202020204" pitchFamily="34" charset="0"/>
+              <a:buChar char="•"/>
             </a:pPr>
             <a:r>
-              <a:rPr sz="1700">
+              <a:rPr lang="en-US" sz="1700" dirty="0">
                 <a:solidFill>
                   <a:srgbClr val="CCE5FF"/>
                 </a:solidFill>
               </a:rPr>
-              <a:t>•  ASR: 61.5%  — second strongest</a:t>
-            </a:r>
-          </a:p>
-          <a:p>
-            <a:pPr algn="l">
+              <a:t>MI-FGSM integrates a momentum term into the iterative process. This prevents the attack from getting trapped in poor local maxima or oscillating wildly in narrow valleys, making the generated adversarial examples much more effective at transferring to break other models.</a:t>
+            </a:r>
+          </a:p>
+          <a:p>
+            <a:pPr marL="285750" indent="-285750">
               <a:spcBef>
                 <a:spcPts val="300"/>
               </a:spcBef>
+              <a:buFont typeface="Arial" panose="020B0604020202020204" pitchFamily="34" charset="0"/>
+              <a:buChar char="•"/>
             </a:pPr>
             <a:r>
-              <a:rPr sz="1700">
+              <a:rPr lang="en-US" sz="1700" dirty="0">
                 <a:solidFill>
                   <a:srgbClr val="CCE5FF"/>
                 </a:solidFill>
               </a:rPr>
-              <a:t>•  50 steps  (α = 0.01,  μ = 1.0)</a:t>
-            </a:r>
-          </a:p>
-          <a:p>
-            <a:pPr algn="l">
+              <a:t>Hyperparameter: </a:t>
+            </a:r>
+          </a:p>
+          <a:p>
+            <a:pPr marL="742950" lvl="1" indent="-285750">
               <a:spcBef>
                 <a:spcPts val="300"/>
               </a:spcBef>
+              <a:buFont typeface="Arial" panose="020B0604020202020204" pitchFamily="34" charset="0"/>
+              <a:buChar char="•"/>
             </a:pPr>
             <a:r>
-              <a:rPr sz="1700">
+              <a:rPr sz="1700" dirty="0">
                 <a:solidFill>
                   <a:srgbClr val="CCE5FF"/>
                 </a:solidFill>
               </a:rPr>
-              <a:t>•  Accumulates momentum: g ← μg + ∇/‖∇‖₁</a:t>
-            </a:r>
-          </a:p>
-          <a:p>
-            <a:pPr algn="l">
+              <a:t>50 steps</a:t>
+            </a:r>
+            <a:endParaRPr lang="en-US" sz="1700" dirty="0">
+              <a:solidFill>
+                <a:srgbClr val="CCE5FF"/>
+              </a:solidFill>
+            </a:endParaRPr>
+          </a:p>
+          <a:p>
+            <a:pPr marL="742950" lvl="1" indent="-285750">
               <a:spcBef>
                 <a:spcPts val="300"/>
               </a:spcBef>
+              <a:buFont typeface="Arial" panose="020B0604020202020204" pitchFamily="34" charset="0"/>
+              <a:buChar char="•"/>
             </a:pPr>
             <a:r>
-              <a:rPr sz="1700">
+              <a:rPr lang="el-GR" sz="1700" dirty="0">
                 <a:solidFill>
                   <a:srgbClr val="CCE5FF"/>
                 </a:solidFill>
               </a:rPr>
-              <a:t>•  Smoother gradient direction, more transferable</a:t>
-            </a:r>
+              <a:t>α = 0.01</a:t>
+            </a:r>
+            <a:endParaRPr lang="en-US" sz="1700" dirty="0">
+              <a:solidFill>
+                <a:srgbClr val="CCE5FF"/>
+              </a:solidFill>
+            </a:endParaRPr>
+          </a:p>
+          <a:p>
+            <a:pPr marL="742950" lvl="1" indent="-285750">
+              <a:spcBef>
+                <a:spcPts val="300"/>
+              </a:spcBef>
+              <a:buFont typeface="Arial" panose="020B0604020202020204" pitchFamily="34" charset="0"/>
+              <a:buChar char="•"/>
+            </a:pPr>
+            <a:r>
+              <a:rPr lang="el-GR" sz="1700" dirty="0">
+                <a:solidFill>
+                  <a:srgbClr val="CCE5FF"/>
+                </a:solidFill>
+              </a:rPr>
+              <a:t>μ</a:t>
+            </a:r>
+            <a:r>
+              <a:rPr lang="en-US" sz="1700" dirty="0">
+                <a:solidFill>
+                  <a:srgbClr val="CCE5FF"/>
+                </a:solidFill>
+              </a:rPr>
+              <a:t> = 1.0 momentum decay</a:t>
+            </a:r>
+            <a:endParaRPr sz="1700" dirty="0">
+              <a:solidFill>
+                <a:srgbClr val="CCE5FF"/>
+              </a:solidFill>
+            </a:endParaRPr>
           </a:p>
         </p:txBody>
       </p:sp>
     </p:spTree>
+  </p:cSld>
+  <p:clrMapOvr>
+    <a:masterClrMapping/>
+  </p:clrMapOvr>
+</p:sld>
+</file>
+
+<file path=ppt/slides/slide4.xml><?xml version="1.0" encoding="utf-8"?>
+<p:sld xmlns:a="http://schemas.openxmlformats.org/drawingml/2006/main" xmlns:r="http://schemas.openxmlformats.org/officeDocument/2006/relationships" xmlns:p="http://schemas.openxmlformats.org/presentationml/2006/main">
+  <p:cSld>
+    <p:spTree>
+      <p:nvGrpSpPr>
+        <p:cNvPr id="1" name="">
+          <a:extLst>
+            <a:ext uri="{FF2B5EF4-FFF2-40B4-BE49-F238E27FC236}">
+              <a16:creationId xmlns:a16="http://schemas.microsoft.com/office/drawing/2014/main" id="{85058891-7227-4B91-E3C3-A16AC4D436A4}"/>
+            </a:ext>
+          </a:extLst>
+        </p:cNvPr>
+        <p:cNvGrpSpPr/>
+        <p:nvPr/>
+      </p:nvGrpSpPr>
+      <p:grpSpPr>
+        <a:xfrm>
+          <a:off x="0" y="0"/>
+          <a:ext cx="0" cy="0"/>
+          <a:chOff x="0" y="0"/>
+          <a:chExt cx="0" cy="0"/>
+        </a:xfrm>
+      </p:grpSpPr>
+      <p:sp>
+        <p:nvSpPr>
+          <p:cNvPr id="4" name="TextBox 3">
+            <a:extLst>
+              <a:ext uri="{FF2B5EF4-FFF2-40B4-BE49-F238E27FC236}">
+                <a16:creationId xmlns:a16="http://schemas.microsoft.com/office/drawing/2014/main" id="{672D06F5-E26A-0FA0-A4BA-ED4B075C3FEE}"/>
+              </a:ext>
+            </a:extLst>
+          </p:cNvPr>
+          <p:cNvSpPr txBox="1"/>
+          <p:nvPr/>
+        </p:nvSpPr>
+        <p:spPr>
+          <a:xfrm>
+            <a:off x="457200" y="164592"/>
+            <a:ext cx="10972800" cy="553998"/>
+          </a:xfrm>
+          <a:prstGeom prst="rect">
+            <a:avLst/>
+          </a:prstGeom>
+          <a:noFill/>
+        </p:spPr>
+        <p:txBody>
+          <a:bodyPr wrap="square">
+            <a:spAutoFit/>
+          </a:bodyPr>
+          <a:lstStyle/>
+          <a:p>
+            <a:pPr algn="l"/>
+            <a:r>
+              <a:rPr lang="en-US" sz="3000" b="1" i="0" dirty="0">
+                <a:solidFill>
+                  <a:srgbClr val="00C2FF"/>
+                </a:solidFill>
+              </a:rPr>
+              <a:t>Evaluation Metrics</a:t>
+            </a:r>
+            <a:endParaRPr sz="3000" b="1" i="0" dirty="0">
+              <a:solidFill>
+                <a:srgbClr val="00C2FF"/>
+              </a:solidFill>
+            </a:endParaRPr>
+          </a:p>
+        </p:txBody>
+      </p:sp>
+      <p:sp>
+        <p:nvSpPr>
+          <p:cNvPr id="6" name="Rectangle 5">
+            <a:extLst>
+              <a:ext uri="{FF2B5EF4-FFF2-40B4-BE49-F238E27FC236}">
+                <a16:creationId xmlns:a16="http://schemas.microsoft.com/office/drawing/2014/main" id="{B7172A60-274B-21CC-E28D-F0BC9EB76BFF}"/>
+              </a:ext>
+            </a:extLst>
+          </p:cNvPr>
+          <p:cNvSpPr/>
+          <p:nvPr/>
+        </p:nvSpPr>
+        <p:spPr>
+          <a:xfrm>
+            <a:off x="457200" y="1097280"/>
+            <a:ext cx="3657600" cy="91440"/>
+          </a:xfrm>
+          <a:prstGeom prst="rect">
+            <a:avLst/>
+          </a:prstGeom>
+          <a:solidFill>
+            <a:srgbClr val="FF4545"/>
+          </a:solidFill>
+          <a:ln>
+            <a:noFill/>
+          </a:ln>
+        </p:spPr>
+        <p:style>
+          <a:lnRef idx="1">
+            <a:schemeClr val="accent1"/>
+          </a:lnRef>
+          <a:fillRef idx="3">
+            <a:schemeClr val="accent1"/>
+          </a:fillRef>
+          <a:effectRef idx="2">
+            <a:schemeClr val="accent1"/>
+          </a:effectRef>
+          <a:fontRef idx="minor">
+            <a:schemeClr val="lt1"/>
+          </a:fontRef>
+        </p:style>
+        <p:txBody>
+          <a:bodyPr rtlCol="0" anchor="ctr"/>
+          <a:lstStyle/>
+          <a:p>
+            <a:pPr algn="ctr"/>
+            <a:endParaRPr/>
+          </a:p>
+        </p:txBody>
+      </p:sp>
+      <p:sp>
+        <p:nvSpPr>
+          <p:cNvPr id="7" name="TextBox 6">
+            <a:extLst>
+              <a:ext uri="{FF2B5EF4-FFF2-40B4-BE49-F238E27FC236}">
+                <a16:creationId xmlns:a16="http://schemas.microsoft.com/office/drawing/2014/main" id="{B0584C15-18F2-76D9-CC2E-EBB44A951816}"/>
+              </a:ext>
+            </a:extLst>
+          </p:cNvPr>
+          <p:cNvSpPr txBox="1"/>
+          <p:nvPr/>
+        </p:nvSpPr>
+        <p:spPr>
+          <a:xfrm>
+            <a:off x="594360" y="1234440"/>
+            <a:ext cx="3383280" cy="430887"/>
+          </a:xfrm>
+          <a:prstGeom prst="rect">
+            <a:avLst/>
+          </a:prstGeom>
+          <a:noFill/>
+        </p:spPr>
+        <p:txBody>
+          <a:bodyPr wrap="square">
+            <a:spAutoFit/>
+          </a:bodyPr>
+          <a:lstStyle/>
+          <a:p>
+            <a:pPr algn="l"/>
+            <a:r>
+              <a:rPr lang="en-US" sz="2200" b="1" i="0" dirty="0">
+                <a:solidFill>
+                  <a:srgbClr val="FF4545"/>
+                </a:solidFill>
+              </a:rPr>
+              <a:t>Recognition Rate</a:t>
+            </a:r>
+            <a:endParaRPr sz="2200" b="1" i="0" dirty="0">
+              <a:solidFill>
+                <a:srgbClr val="FF4545"/>
+              </a:solidFill>
+            </a:endParaRPr>
+          </a:p>
+        </p:txBody>
+      </p:sp>
+      <p:sp>
+        <p:nvSpPr>
+          <p:cNvPr id="9" name="TextBox 8">
+            <a:extLst>
+              <a:ext uri="{FF2B5EF4-FFF2-40B4-BE49-F238E27FC236}">
+                <a16:creationId xmlns:a16="http://schemas.microsoft.com/office/drawing/2014/main" id="{448BE19C-37D2-BAE3-9FA6-D8ACA42CF39B}"/>
+              </a:ext>
+            </a:extLst>
+          </p:cNvPr>
+          <p:cNvSpPr txBox="1"/>
+          <p:nvPr/>
+        </p:nvSpPr>
+        <p:spPr>
+          <a:xfrm>
+            <a:off x="457200" y="1685835"/>
+            <a:ext cx="6596149" cy="692497"/>
+          </a:xfrm>
+          <a:prstGeom prst="rect">
+            <a:avLst/>
+          </a:prstGeom>
+          <a:noFill/>
+        </p:spPr>
+        <p:txBody>
+          <a:bodyPr wrap="square">
+            <a:spAutoFit/>
+          </a:bodyPr>
+          <a:lstStyle/>
+          <a:p>
+            <a:pPr marL="285750" indent="-285750">
+              <a:buFont typeface="Arial" panose="020B0604020202020204" pitchFamily="34" charset="0"/>
+              <a:buChar char="•"/>
+            </a:pPr>
+            <a:r>
+              <a:rPr lang="en-US" sz="1900" dirty="0">
+                <a:solidFill>
+                  <a:srgbClr val="CCE5FF"/>
+                </a:solidFill>
+              </a:rPr>
+              <a:t>Accuracy on clean (</a:t>
+            </a:r>
+            <a:r>
+              <a:rPr lang="en-US" sz="1900" dirty="0" err="1">
+                <a:solidFill>
+                  <a:srgbClr val="CCE5FF"/>
+                </a:solidFill>
+              </a:rPr>
+              <a:t>unattacked</a:t>
+            </a:r>
+            <a:r>
+              <a:rPr lang="en-US" sz="1900" dirty="0">
+                <a:solidFill>
+                  <a:srgbClr val="CCE5FF"/>
+                </a:solidFill>
+              </a:rPr>
+              <a:t>) test images</a:t>
+            </a:r>
+          </a:p>
+          <a:p>
+            <a:pPr marL="285750" indent="-285750">
+              <a:buFont typeface="Arial" panose="020B0604020202020204" pitchFamily="34" charset="0"/>
+              <a:buChar char="•"/>
+            </a:pPr>
+            <a:r>
+              <a:rPr lang="en-US" sz="1900" dirty="0">
+                <a:solidFill>
+                  <a:srgbClr val="CCE5FF"/>
+                </a:solidFill>
+              </a:rPr>
+              <a:t>Tells how strong the model is normally</a:t>
+            </a:r>
+          </a:p>
+        </p:txBody>
+      </p:sp>
+      <p:sp>
+        <p:nvSpPr>
+          <p:cNvPr id="11" name="Rectangle 10">
+            <a:extLst>
+              <a:ext uri="{FF2B5EF4-FFF2-40B4-BE49-F238E27FC236}">
+                <a16:creationId xmlns:a16="http://schemas.microsoft.com/office/drawing/2014/main" id="{887A50B4-AE9F-98F7-2EA5-A5BF2A8723DB}"/>
+              </a:ext>
+            </a:extLst>
+          </p:cNvPr>
+          <p:cNvSpPr/>
+          <p:nvPr/>
+        </p:nvSpPr>
+        <p:spPr>
+          <a:xfrm>
+            <a:off x="594360" y="3429000"/>
+            <a:ext cx="3657600" cy="91440"/>
+          </a:xfrm>
+          <a:prstGeom prst="rect">
+            <a:avLst/>
+          </a:prstGeom>
+          <a:solidFill>
+            <a:srgbClr val="4CAF50"/>
+          </a:solidFill>
+          <a:ln>
+            <a:noFill/>
+          </a:ln>
+        </p:spPr>
+        <p:style>
+          <a:lnRef idx="1">
+            <a:schemeClr val="accent1"/>
+          </a:lnRef>
+          <a:fillRef idx="3">
+            <a:schemeClr val="accent1"/>
+          </a:fillRef>
+          <a:effectRef idx="2">
+            <a:schemeClr val="accent1"/>
+          </a:effectRef>
+          <a:fontRef idx="minor">
+            <a:schemeClr val="lt1"/>
+          </a:fontRef>
+        </p:style>
+        <p:txBody>
+          <a:bodyPr rtlCol="0" anchor="ctr"/>
+          <a:lstStyle/>
+          <a:p>
+            <a:pPr algn="ctr"/>
+            <a:endParaRPr/>
+          </a:p>
+        </p:txBody>
+      </p:sp>
+      <p:sp>
+        <p:nvSpPr>
+          <p:cNvPr id="14" name="TextBox 13">
+            <a:extLst>
+              <a:ext uri="{FF2B5EF4-FFF2-40B4-BE49-F238E27FC236}">
+                <a16:creationId xmlns:a16="http://schemas.microsoft.com/office/drawing/2014/main" id="{583D90D2-2D04-7763-40DA-F77BAD7A5F47}"/>
+              </a:ext>
+            </a:extLst>
+          </p:cNvPr>
+          <p:cNvSpPr txBox="1"/>
+          <p:nvPr/>
+        </p:nvSpPr>
+        <p:spPr>
+          <a:xfrm>
+            <a:off x="457200" y="4133755"/>
+            <a:ext cx="8674331" cy="677108"/>
+          </a:xfrm>
+          <a:prstGeom prst="rect">
+            <a:avLst/>
+          </a:prstGeom>
+          <a:noFill/>
+        </p:spPr>
+        <p:txBody>
+          <a:bodyPr wrap="square">
+            <a:spAutoFit/>
+          </a:bodyPr>
+          <a:lstStyle/>
+          <a:p>
+            <a:pPr marL="285750" indent="-285750">
+              <a:buFont typeface="Arial" panose="020B0604020202020204" pitchFamily="34" charset="0"/>
+              <a:buChar char="•"/>
+            </a:pPr>
+            <a:r>
+              <a:rPr lang="en-US" sz="1900" dirty="0">
+                <a:solidFill>
+                  <a:srgbClr val="CCE5FF"/>
+                </a:solidFill>
+              </a:rPr>
+              <a:t>% of correctly-classified samples that are misclassified after the attack</a:t>
+            </a:r>
+          </a:p>
+          <a:p>
+            <a:pPr marL="285750" indent="-285750">
+              <a:buFont typeface="Arial" panose="020B0604020202020204" pitchFamily="34" charset="0"/>
+              <a:buChar char="•"/>
+            </a:pPr>
+            <a:r>
+              <a:rPr lang="en-US" sz="1900" dirty="0">
+                <a:solidFill>
+                  <a:srgbClr val="CCE5FF"/>
+                </a:solidFill>
+              </a:rPr>
+              <a:t>Tells how easily strength of  model collapses under attack </a:t>
+            </a:r>
+          </a:p>
+        </p:txBody>
+      </p:sp>
+      <p:sp>
+        <p:nvSpPr>
+          <p:cNvPr id="2" name="TextBox 1">
+            <a:extLst>
+              <a:ext uri="{FF2B5EF4-FFF2-40B4-BE49-F238E27FC236}">
+                <a16:creationId xmlns:a16="http://schemas.microsoft.com/office/drawing/2014/main" id="{2F54D5A6-A6C7-A375-7C70-F993AFD2305D}"/>
+              </a:ext>
+            </a:extLst>
+          </p:cNvPr>
+          <p:cNvSpPr txBox="1"/>
+          <p:nvPr/>
+        </p:nvSpPr>
+        <p:spPr>
+          <a:xfrm>
+            <a:off x="731520" y="3611654"/>
+            <a:ext cx="3383280" cy="430887"/>
+          </a:xfrm>
+          <a:prstGeom prst="rect">
+            <a:avLst/>
+          </a:prstGeom>
+          <a:noFill/>
+        </p:spPr>
+        <p:txBody>
+          <a:bodyPr wrap="square">
+            <a:spAutoFit/>
+          </a:bodyPr>
+          <a:lstStyle/>
+          <a:p>
+            <a:pPr algn="l"/>
+            <a:r>
+              <a:rPr lang="en-US" sz="2200" b="1" i="0" dirty="0">
+                <a:solidFill>
+                  <a:srgbClr val="00B050"/>
+                </a:solidFill>
+              </a:rPr>
+              <a:t>Attack Success Rate (ASR) </a:t>
+            </a:r>
+          </a:p>
+        </p:txBody>
+      </p:sp>
+    </p:spTree>
+    <p:extLst>
+      <p:ext uri="{BB962C8B-B14F-4D97-AF65-F5344CB8AC3E}">
+        <p14:creationId xmlns:p14="http://schemas.microsoft.com/office/powerpoint/2010/main" val="3698982559"/>
+      </p:ext>
+    </p:extLst>
   </p:cSld>
   <p:clrMapOvr>
     <a:masterClrMapping/>
@@ -11035,7 +12179,7 @@
         <p:spPr>
           <a:xfrm>
             <a:off x="5852160" y="3200400"/>
-            <a:ext cx="6035040" cy="658368"/>
+            <a:ext cx="6035040" cy="338554"/>
           </a:xfrm>
           <a:prstGeom prst="rect">
             <a:avLst/>
@@ -11050,12 +12194,28 @@
           <a:p>
             <a:pPr algn="ctr"/>
             <a:r>
-              <a:rPr sz="1600" b="0" i="0">
+              <a:rPr sz="1600" b="0" i="0" dirty="0">
                 <a:solidFill>
                   <a:srgbClr val="FFFFFF"/>
                 </a:solidFill>
               </a:rPr>
-              <a:t>Momentum stabilises gradient direction</a:t>
+              <a:t>Momentum stabili</a:t>
+            </a:r>
+            <a:r>
+              <a:rPr lang="en-US" sz="1600" b="0" i="0" dirty="0">
+                <a:solidFill>
+                  <a:srgbClr val="FFFFFF"/>
+                </a:solidFill>
+              </a:rPr>
+              <a:t>z</a:t>
+            </a:r>
+            <a:r>
+              <a:rPr sz="1600" b="0" i="0" dirty="0">
+                <a:solidFill>
+                  <a:srgbClr val="FFFFFF"/>
+                </a:solidFill>
+              </a:rPr>
+              <a:t>es gradient direction</a:t>
             </a:r>
           </a:p>
         </p:txBody>
@@ -11605,7 +12765,7 @@
         <p:spPr>
           <a:xfrm>
             <a:off x="6309360" y="6537960"/>
-            <a:ext cx="2103120" cy="457200"/>
+            <a:ext cx="2103120" cy="292388"/>
           </a:xfrm>
           <a:prstGeom prst="rect">
             <a:avLst/>
@@ -11620,13 +12780,12 @@
           <a:p>
             <a:pPr algn="ctr"/>
             <a:r>
-              <a:rPr sz="1300" b="0" i="0">
+              <a:rPr sz="1300" b="0" i="0" dirty="0">
                 <a:solidFill>
                   <a:srgbClr val="AABBCC"/>
                 </a:solidFill>
               </a:rPr>
-              <a:t>I-FGSM
-/PGD★</a:t>
+              <a:t>I-FGSM/PGD★</a:t>
             </a:r>
           </a:p>
         </p:txBody>
@@ -11639,7 +12798,7 @@
         </p:nvSpPr>
         <p:spPr>
           <a:xfrm>
-            <a:off x="9235440" y="4044345"/>
+            <a:off x="9262745" y="4169664"/>
             <a:ext cx="2926080" cy="347472"/>
           </a:xfrm>
           <a:prstGeom prst="rect">
@@ -11655,7 +12814,7 @@
           <a:p>
             <a:pPr algn="l"/>
             <a:r>
-              <a:rPr sz="1300" b="0" i="1">
+              <a:rPr sz="1300" b="0" i="1" dirty="0">
                 <a:solidFill>
                   <a:srgbClr val="00C2FF"/>
                 </a:solidFill>
@@ -11673,8 +12832,8 @@
         </p:nvSpPr>
         <p:spPr>
           <a:xfrm>
-            <a:off x="8744786" y="4739289"/>
-            <a:ext cx="3291840" cy="1131079"/>
+            <a:off x="8846820" y="5141523"/>
+            <a:ext cx="3291840" cy="861774"/>
           </a:xfrm>
           <a:prstGeom prst="rect">
             <a:avLst/>
@@ -11745,37 +12904,6 @@
                 </a:solidFill>
               </a:rPr>
               <a:t>•  I-FGSM/PGD: 70.8%  (strongest)</a:t>
-            </a:r>
-          </a:p>
-          <a:p>
-            <a:pPr algn="l">
-              <a:spcBef>
-                <a:spcPts val="300"/>
-              </a:spcBef>
-            </a:pPr>
-            <a:r>
-              <a:rPr sz="1500" dirty="0">
-                <a:solidFill>
-                  <a:srgbClr val="CCE5FF"/>
-                </a:solidFill>
-              </a:rPr>
-              <a:t>•  Random </a:t>
-            </a:r>
-            <a:r>
-              <a:rPr sz="1500" dirty="0" err="1">
-                <a:solidFill>
-                  <a:srgbClr val="CCE5FF"/>
-                </a:solidFill>
-              </a:rPr>
-              <a:t>init</a:t>
-            </a:r>
-            <a:r>
-              <a:rPr sz="1500" dirty="0">
-                <a:solidFill>
-                  <a:srgbClr val="CCE5FF"/>
-                </a:solidFill>
-              </a:rPr>
-              <a:t> &gt; momentum here</a:t>
             </a:r>
           </a:p>
         </p:txBody>
@@ -11926,7 +13054,7 @@
         <p:spPr>
           <a:xfrm>
             <a:off x="704088" y="1600200"/>
-            <a:ext cx="10698480" cy="621792"/>
+            <a:ext cx="10698480" cy="338554"/>
           </a:xfrm>
           <a:prstGeom prst="rect">
             <a:avLst/>
@@ -11941,12 +13069,28 @@
           <a:p>
             <a:pPr algn="l"/>
             <a:r>
-              <a:rPr sz="1600" b="0" i="0">
+              <a:rPr sz="1600" b="0" i="0" dirty="0">
                 <a:solidFill>
                   <a:srgbClr val="CCE5FF"/>
                 </a:solidFill>
               </a:rPr>
-              <a:t>CNN achieves 99.1% clean accuracy, yet FGSM alone fools it 32.6% of the time with perturbations invisible to humans.</a:t>
+              <a:t>CNN achieves 99.1% clean accuracy, </a:t>
+            </a:r>
+            <a:r>
+              <a:rPr lang="en-US" sz="1600" b="0" i="0" dirty="0">
+                <a:solidFill>
+                  <a:srgbClr val="CCE5FF"/>
+                </a:solidFill>
+              </a:rPr>
+              <a:t>but even</a:t>
+            </a:r>
+            <a:r>
+              <a:rPr sz="1600" b="0" i="0" dirty="0">
+                <a:solidFill>
+                  <a:srgbClr val="CCE5FF"/>
+                </a:solidFill>
+              </a:rPr>
+              <a:t> FGSM alone fools it 32.6% of the time with perturbations invisible to humans.</a:t>
             </a:r>
           </a:p>
         </p:txBody>
@@ -12019,7 +13163,7 @@
           <a:p>
             <a:pPr algn="l"/>
             <a:r>
-              <a:rPr sz="2000" b="1" i="0">
+              <a:rPr sz="2000" b="1" i="0" dirty="0">
                 <a:solidFill>
                   <a:srgbClr val="4CAF50"/>
                 </a:solidFill>
@@ -12038,7 +13182,7 @@
         <p:spPr>
           <a:xfrm>
             <a:off x="704088" y="2916936"/>
-            <a:ext cx="10698480" cy="621792"/>
+            <a:ext cx="10698480" cy="338554"/>
           </a:xfrm>
           <a:prstGeom prst="rect">
             <a:avLst/>
@@ -12053,12 +13197,28 @@
           <a:p>
             <a:pPr algn="l"/>
             <a:r>
-              <a:rPr sz="1600" b="0" i="0">
+              <a:rPr sz="1600" b="0" i="0" dirty="0">
                 <a:solidFill>
                   <a:srgbClr val="CCE5FF"/>
                 </a:solidFill>
               </a:rPr>
-              <a:t>FGSM (32.6%) vs I-FGSM/PGD (70.8%). Fifty small projected steps fully exploit the ε = 0.3 budget.</a:t>
+              <a:t>FGSM (32.6%) vs I-FGSM/PGD (70.8%). Fifty small projected steps fully exploit the </a:t>
+            </a:r>
+            <a:r>
+              <a:rPr sz="1600" b="0" i="0" dirty="0" err="1">
+                <a:solidFill>
+                  <a:srgbClr val="CCE5FF"/>
+                </a:solidFill>
+              </a:rPr>
+              <a:t>ε</a:t>
+            </a:r>
+            <a:r>
+              <a:rPr sz="1600" b="0" i="0" dirty="0">
+                <a:solidFill>
+                  <a:srgbClr val="CCE5FF"/>
+                </a:solidFill>
+              </a:rPr>
+              <a:t> = 0.3.</a:t>
             </a:r>
           </a:p>
         </p:txBody>
@@ -12150,7 +13310,7 @@
         <p:spPr>
           <a:xfrm>
             <a:off x="704088" y="4233672"/>
-            <a:ext cx="10698480" cy="621792"/>
+            <a:ext cx="10698480" cy="338554"/>
           </a:xfrm>
           <a:prstGeom prst="rect">
             <a:avLst/>
@@ -12165,12 +13325,12 @@
           <a:p>
             <a:pPr algn="l"/>
             <a:r>
-              <a:rPr sz="1600" b="0" i="0">
+              <a:rPr sz="1600" b="0" i="0" dirty="0">
                 <a:solidFill>
                   <a:srgbClr val="CCE5FF"/>
                 </a:solidFill>
               </a:rPr>
-              <a:t>PGD (70.8%) &gt; MI-FGSM (61.5%). Random start explores a wider area of the ε-ball than momentum alone.</a:t>
+              <a:t>PGD (70.8%) &gt; MI-FGSM (61.5%). Random start explores a wider area than momentum alone.</a:t>
             </a:r>
           </a:p>
         </p:txBody>
@@ -14599,4 +15759,319 @@
     </a:ext>
   </a:extLst>
 </a:theme>
+</file>
+
+<file path=ppt/theme/theme4.xml><?xml version="1.0" encoding="utf-8"?>
+<a:theme xmlns:a="http://schemas.openxmlformats.org/drawingml/2006/main" name="Office Theme">
+  <a:themeElements>
+    <a:clrScheme name="Office">
+      <a:dk1>
+        <a:sysClr val="windowText" lastClr="000000"/>
+      </a:dk1>
+      <a:lt1>
+        <a:sysClr val="window" lastClr="FFFFFF"/>
+      </a:lt1>
+      <a:dk2>
+        <a:srgbClr val="0E2841"/>
+      </a:dk2>
+      <a:lt2>
+        <a:srgbClr val="E8E8E8"/>
+      </a:lt2>
+      <a:accent1>
+        <a:srgbClr val="156082"/>
+      </a:accent1>
+      <a:accent2>
+        <a:srgbClr val="E97132"/>
+      </a:accent2>
+      <a:accent3>
+        <a:srgbClr val="196B24"/>
+      </a:accent3>
+      <a:accent4>
+        <a:srgbClr val="0F9ED5"/>
+      </a:accent4>
+      <a:accent5>
+        <a:srgbClr val="A02B93"/>
+      </a:accent5>
+      <a:accent6>
+        <a:srgbClr val="4EA72E"/>
+      </a:accent6>
+      <a:hlink>
+        <a:srgbClr val="467886"/>
+      </a:hlink>
+      <a:folHlink>
+        <a:srgbClr val="96607D"/>
+      </a:folHlink>
+    </a:clrScheme>
+    <a:fontScheme name="Office">
+      <a:majorFont>
+        <a:latin typeface="Aptos Display" panose="02110004020202020204"/>
+        <a:ea typeface=""/>
+        <a:cs typeface=""/>
+        <a:font script="Jpan" typeface="游ゴシック Light"/>
+        <a:font script="Hang" typeface="맑은 고딕"/>
+        <a:font script="Hans" typeface="等线 Light"/>
+        <a:font script="Hant" typeface="新細明體"/>
+        <a:font script="Arab" typeface="Times New Roman"/>
+        <a:font script="Hebr" typeface="Times New Roman"/>
+        <a:font script="Thai" typeface="Angsana New"/>
+        <a:font script="Ethi" typeface="Nyala"/>
+        <a:font script="Beng" typeface="Vrinda"/>
+        <a:font script="Gujr" typeface="Shruti"/>
+        <a:font script="Khmr" typeface="MoolBoran"/>
+        <a:font script="Knda" typeface="Tunga"/>
+        <a:font script="Guru" typeface="Raavi"/>
+        <a:font script="Cans" typeface="Euphemia"/>
+        <a:font script="Cher" typeface="Plantagenet Cherokee"/>
+        <a:font script="Yiii" typeface="Microsoft Yi Baiti"/>
+        <a:font script="Tibt" typeface="Microsoft Himalaya"/>
+        <a:font script="Thaa" typeface="MV Boli"/>
+        <a:font script="Deva" typeface="Mangal"/>
+        <a:font script="Telu" typeface="Gautami"/>
+        <a:font script="Taml" typeface="Latha"/>
+        <a:font script="Syrc" typeface="Estrangelo Edessa"/>
+        <a:font script="Orya" typeface="Kalinga"/>
+        <a:font script="Mlym" typeface="Kartika"/>
+        <a:font script="Laoo" typeface="DokChampa"/>
+        <a:font script="Sinh" typeface="Iskoola Pota"/>
+        <a:font script="Mong" typeface="Mongolian Baiti"/>
+        <a:font script="Viet" typeface="Times New Roman"/>
+        <a:font script="Uigh" typeface="Microsoft Uighur"/>
+        <a:font script="Geor" typeface="Sylfaen"/>
+        <a:font script="Armn" typeface="Arial"/>
+        <a:font script="Bugi" typeface="Leelawadee UI"/>
+        <a:font script="Bopo" typeface="Microsoft JhengHei"/>
+        <a:font script="Java" typeface="Javanese Text"/>
+        <a:font script="Lisu" typeface="Segoe UI"/>
+        <a:font script="Mymr" typeface="Myanmar Text"/>
+        <a:font script="Nkoo" typeface="Ebrima"/>
+        <a:font script="Olck" typeface="Nirmala UI"/>
+        <a:font script="Osma" typeface="Ebrima"/>
+        <a:font script="Phag" typeface="Phagspa"/>
+        <a:font script="Syrn" typeface="Estrangelo Edessa"/>
+        <a:font script="Syrj" typeface="Estrangelo Edessa"/>
+        <a:font script="Syre" typeface="Estrangelo Edessa"/>
+        <a:font script="Sora" typeface="Nirmala UI"/>
+        <a:font script="Tale" typeface="Microsoft Tai Le"/>
+        <a:font script="Talu" typeface="Microsoft New Tai Lue"/>
+        <a:font script="Tfng" typeface="Ebrima"/>
+      </a:majorFont>
+      <a:minorFont>
+        <a:latin typeface="Aptos" panose="02110004020202020204"/>
+        <a:ea typeface=""/>
+        <a:cs typeface=""/>
+        <a:font script="Jpan" typeface="游ゴシック"/>
+        <a:font script="Hang" typeface="맑은 고딕"/>
+        <a:font script="Hans" typeface="等线"/>
+        <a:font script="Hant" typeface="新細明體"/>
+        <a:font script="Arab" typeface="Arial"/>
+        <a:font script="Hebr" typeface="Arial"/>
+        <a:font script="Thai" typeface="Cordia New"/>
+        <a:font script="Ethi" typeface="Nyala"/>
+        <a:font script="Beng" typeface="Vrinda"/>
+        <a:font script="Gujr" typeface="Shruti"/>
+        <a:font script="Khmr" typeface="DaunPenh"/>
+        <a:font script="Knda" typeface="Tunga"/>
+        <a:font script="Guru" typeface="Raavi"/>
+        <a:font script="Cans" typeface="Euphemia"/>
+        <a:font script="Cher" typeface="Plantagenet Cherokee"/>
+        <a:font script="Yiii" typeface="Microsoft Yi Baiti"/>
+        <a:font script="Tibt" typeface="Microsoft Himalaya"/>
+        <a:font script="Thaa" typeface="MV Boli"/>
+        <a:font script="Deva" typeface="Mangal"/>
+        <a:font script="Telu" typeface="Gautami"/>
+        <a:font script="Taml" typeface="Latha"/>
+        <a:font script="Syrc" typeface="Estrangelo Edessa"/>
+        <a:font script="Orya" typeface="Kalinga"/>
+        <a:font script="Mlym" typeface="Kartika"/>
+        <a:font script="Laoo" typeface="DokChampa"/>
+        <a:font script="Sinh" typeface="Iskoola Pota"/>
+        <a:font script="Mong" typeface="Mongolian Baiti"/>
+        <a:font script="Viet" typeface="Arial"/>
+        <a:font script="Uigh" typeface="Microsoft Uighur"/>
+        <a:font script="Geor" typeface="Sylfaen"/>
+        <a:font script="Armn" typeface="Arial"/>
+        <a:font script="Bugi" typeface="Leelawadee UI"/>
+        <a:font script="Bopo" typeface="Microsoft JhengHei"/>
+        <a:font script="Java" typeface="Javanese Text"/>
+        <a:font script="Lisu" typeface="Segoe UI"/>
+        <a:font script="Mymr" typeface="Myanmar Text"/>
+        <a:font script="Nkoo" typeface="Ebrima"/>
+        <a:font script="Olck" typeface="Nirmala UI"/>
+        <a:font script="Osma" typeface="Ebrima"/>
+        <a:font script="Phag" typeface="Phagspa"/>
+        <a:font script="Syrn" typeface="Estrangelo Edessa"/>
+        <a:font script="Syrj" typeface="Estrangelo Edessa"/>
+        <a:font script="Syre" typeface="Estrangelo Edessa"/>
+        <a:font script="Sora" typeface="Nirmala UI"/>
+        <a:font script="Tale" typeface="Microsoft Tai Le"/>
+        <a:font script="Talu" typeface="Microsoft New Tai Lue"/>
+        <a:font script="Tfng" typeface="Ebrima"/>
+      </a:minorFont>
+    </a:fontScheme>
+    <a:fmtScheme name="Office">
+      <a:fillStyleLst>
+        <a:solidFill>
+          <a:schemeClr val="phClr"/>
+        </a:solidFill>
+        <a:gradFill rotWithShape="1">
+          <a:gsLst>
+            <a:gs pos="0">
+              <a:schemeClr val="phClr">
+                <a:lumMod val="110000"/>
+                <a:satMod val="105000"/>
+                <a:tint val="67000"/>
+              </a:schemeClr>
+            </a:gs>
+            <a:gs pos="50000">
+              <a:schemeClr val="phClr">
+                <a:lumMod val="105000"/>
+                <a:satMod val="103000"/>
+                <a:tint val="73000"/>
+              </a:schemeClr>
+            </a:gs>
+            <a:gs pos="100000">
+              <a:schemeClr val="phClr">
+                <a:lumMod val="105000"/>
+                <a:satMod val="109000"/>
+                <a:tint val="81000"/>
+              </a:schemeClr>
+            </a:gs>
+          </a:gsLst>
+          <a:lin ang="5400000" scaled="0"/>
+        </a:gradFill>
+        <a:gradFill rotWithShape="1">
+          <a:gsLst>
+            <a:gs pos="0">
+              <a:schemeClr val="phClr">
+                <a:satMod val="103000"/>
+                <a:lumMod val="102000"/>
+                <a:tint val="94000"/>
+              </a:schemeClr>
+            </a:gs>
+            <a:gs pos="50000">
+              <a:schemeClr val="phClr">
+                <a:satMod val="110000"/>
+                <a:lumMod val="100000"/>
+                <a:shade val="100000"/>
+              </a:schemeClr>
+            </a:gs>
+            <a:gs pos="100000">
+              <a:schemeClr val="phClr">
+                <a:lumMod val="99000"/>
+                <a:satMod val="120000"/>
+                <a:shade val="78000"/>
+              </a:schemeClr>
+            </a:gs>
+          </a:gsLst>
+          <a:lin ang="5400000" scaled="0"/>
+        </a:gradFill>
+      </a:fillStyleLst>
+      <a:lnStyleLst>
+        <a:ln w="12700" cap="flat" cmpd="sng" algn="ctr">
+          <a:solidFill>
+            <a:schemeClr val="phClr"/>
+          </a:solidFill>
+          <a:prstDash val="solid"/>
+          <a:miter lim="800000"/>
+        </a:ln>
+        <a:ln w="19050" cap="flat" cmpd="sng" algn="ctr">
+          <a:solidFill>
+            <a:schemeClr val="phClr"/>
+          </a:solidFill>
+          <a:prstDash val="solid"/>
+          <a:miter lim="800000"/>
+        </a:ln>
+        <a:ln w="25400" cap="flat" cmpd="sng" algn="ctr">
+          <a:solidFill>
+            <a:schemeClr val="phClr"/>
+          </a:solidFill>
+          <a:prstDash val="solid"/>
+          <a:miter lim="800000"/>
+        </a:ln>
+      </a:lnStyleLst>
+      <a:effectStyleLst>
+        <a:effectStyle>
+          <a:effectLst/>
+        </a:effectStyle>
+        <a:effectStyle>
+          <a:effectLst/>
+        </a:effectStyle>
+        <a:effectStyle>
+          <a:effectLst>
+            <a:outerShdw blurRad="57150" dist="19050" dir="5400000" algn="ctr" rotWithShape="0">
+              <a:srgbClr val="000000">
+                <a:alpha val="63000"/>
+              </a:srgbClr>
+            </a:outerShdw>
+          </a:effectLst>
+        </a:effectStyle>
+      </a:effectStyleLst>
+      <a:bgFillStyleLst>
+        <a:solidFill>
+          <a:schemeClr val="phClr"/>
+        </a:solidFill>
+        <a:solidFill>
+          <a:schemeClr val="phClr">
+            <a:tint val="95000"/>
+            <a:satMod val="170000"/>
+          </a:schemeClr>
+        </a:solidFill>
+        <a:gradFill rotWithShape="1">
+          <a:gsLst>
+            <a:gs pos="0">
+              <a:schemeClr val="phClr">
+                <a:tint val="93000"/>
+                <a:satMod val="150000"/>
+                <a:shade val="98000"/>
+                <a:lumMod val="102000"/>
+              </a:schemeClr>
+            </a:gs>
+            <a:gs pos="50000">
+              <a:schemeClr val="phClr">
+                <a:tint val="98000"/>
+                <a:satMod val="130000"/>
+                <a:shade val="90000"/>
+                <a:lumMod val="103000"/>
+              </a:schemeClr>
+            </a:gs>
+            <a:gs pos="100000">
+              <a:schemeClr val="phClr">
+                <a:shade val="63000"/>
+                <a:satMod val="120000"/>
+              </a:schemeClr>
+            </a:gs>
+          </a:gsLst>
+          <a:lin ang="5400000" scaled="0"/>
+        </a:gradFill>
+      </a:bgFillStyleLst>
+    </a:fmtScheme>
+  </a:themeElements>
+  <a:objectDefaults>
+    <a:lnDef>
+      <a:spPr/>
+      <a:bodyPr/>
+      <a:lstStyle/>
+      <a:style>
+        <a:lnRef idx="2">
+          <a:schemeClr val="accent1"/>
+        </a:lnRef>
+        <a:fillRef idx="0">
+          <a:schemeClr val="accent1"/>
+        </a:fillRef>
+        <a:effectRef idx="1">
+          <a:schemeClr val="accent1"/>
+        </a:effectRef>
+        <a:fontRef idx="minor">
+          <a:schemeClr val="tx1"/>
+        </a:fontRef>
+      </a:style>
+    </a:lnDef>
+  </a:objectDefaults>
+  <a:extraClrSchemeLst/>
+  <a:extLst>
+    <a:ext uri="{05A4C25C-085E-4340-85A3-A5531E510DB2}">
+      <thm15:themeFamily xmlns:thm15="http://schemas.microsoft.com/office/thememl/2012/main" name="Office Theme" id="{2E142A2C-CD16-42D6-873A-C26D2A0506FA}" vid="{1BDDFF52-6CD6-40A5-AB3C-68EB2F1E4D0A}"/>
+    </a:ext>
+  </a:extLst>
+</a:theme>
 </file>
--- a/Assignment7.1-Attack_MNIST_Presentation.pptx
+++ b/Assignment7.1-Attack_MNIST_Presentation.pptx
@@ -7,7 +7,7 @@
     <p:sldMasterId id="2147483707" r:id="rId3"/>
   </p:sldMasterIdLst>
   <p:notesMasterIdLst>
-    <p:notesMasterId r:id="rId12"/>
+    <p:notesMasterId r:id="rId10"/>
   </p:notesMasterIdLst>
   <p:sldIdLst>
     <p:sldId id="256" r:id="rId4"/>
@@ -16,8 +16,6 @@
     <p:sldId id="265" r:id="rId7"/>
     <p:sldId id="261" r:id="rId8"/>
     <p:sldId id="262" r:id="rId9"/>
-    <p:sldId id="257" r:id="rId10"/>
-    <p:sldId id="260" r:id="rId11"/>
   </p:sldIdLst>
   <p:sldSz cx="12188825" cy="6858000"/>
   <p:notesSz cx="6858000" cy="9144000"/>
@@ -9169,8 +9167,8 @@
         </p:nvSpPr>
         <p:spPr>
           <a:xfrm>
-            <a:off x="457200" y="1097280"/>
-            <a:ext cx="11247120" cy="1738938"/>
+            <a:off x="457199" y="1097280"/>
+            <a:ext cx="11731625" cy="2069797"/>
           </a:xfrm>
           <a:prstGeom prst="rect">
             <a:avLst/>
@@ -9265,7 +9263,7 @@
             </a:r>
           </a:p>
           <a:p>
-            <a:pPr algn="l">
+            <a:pPr>
               <a:spcBef>
                 <a:spcPts val="300"/>
               </a:spcBef>
@@ -9294,6 +9292,50 @@
               </a:rPr>
               <a:t> = 0.3)</a:t>
             </a:r>
+            <a:r>
+              <a:rPr lang="en-US" sz="1900" dirty="0">
+                <a:solidFill>
+                  <a:srgbClr val="CCE5FF"/>
+                </a:solidFill>
+              </a:rPr>
+              <a:t> </a:t>
+            </a:r>
+          </a:p>
+          <a:p>
+            <a:pPr>
+              <a:spcBef>
+                <a:spcPts val="300"/>
+              </a:spcBef>
+            </a:pPr>
+            <a:r>
+              <a:rPr lang="en-US" sz="1900" dirty="0">
+                <a:solidFill>
+                  <a:srgbClr val="CCE5FF"/>
+                </a:solidFill>
+              </a:rPr>
+              <a:t>•  </a:t>
+            </a:r>
+            <a:r>
+              <a:rPr lang="el-GR" sz="1900" dirty="0">
+                <a:solidFill>
+                  <a:srgbClr val="CCE5FF"/>
+                </a:solidFill>
+              </a:rPr>
+              <a:t>ε </a:t>
+            </a:r>
+            <a:r>
+              <a:rPr lang="en-US" sz="1900" dirty="0">
+                <a:solidFill>
+                  <a:srgbClr val="CCE5FF"/>
+                </a:solidFill>
+              </a:rPr>
+              <a:t>is the maximum allowed change to any single pixel value; 0.3 is a commonly used benchmark value for MNIST</a:t>
+            </a:r>
+            <a:endParaRPr sz="1900" dirty="0">
+              <a:solidFill>
+                <a:srgbClr val="CCE5FF"/>
+              </a:solidFill>
+            </a:endParaRPr>
           </a:p>
         </p:txBody>
       </p:sp>
@@ -10060,12 +10102,28 @@
           <a:p>
             <a:pPr algn="l"/>
             <a:r>
-              <a:rPr sz="3000" b="1" i="0">
+              <a:rPr sz="3000" b="1" i="0" dirty="0">
                 <a:solidFill>
                   <a:srgbClr val="00C2FF"/>
                 </a:solidFill>
               </a:rPr>
-              <a:t>Three Gradient-Based Attacks  (ε = 0.3)</a:t>
+              <a:t>Three Gradient-Based Attacks  (</a:t>
+            </a:r>
+            <a:r>
+              <a:rPr sz="3000" b="1" i="0" dirty="0" err="1">
+                <a:solidFill>
+                  <a:srgbClr val="00C2FF"/>
+                </a:solidFill>
+              </a:rPr>
+              <a:t>ε</a:t>
+            </a:r>
+            <a:r>
+              <a:rPr sz="3000" b="1" i="0" dirty="0">
+                <a:solidFill>
+                  <a:srgbClr val="00C2FF"/>
+                </a:solidFill>
+              </a:rPr>
+              <a:t> = 0.3)</a:t>
             </a:r>
           </a:p>
         </p:txBody>
@@ -10903,7 +10961,7 @@
         </p:nvSpPr>
         <p:spPr>
           <a:xfrm>
-            <a:off x="457200" y="1097280"/>
+            <a:off x="594360" y="1111408"/>
             <a:ext cx="3657600" cy="91440"/>
           </a:xfrm>
           <a:prstGeom prst="rect">
@@ -11243,7 +11301,7 @@
         <p:spPr>
           <a:xfrm>
             <a:off x="457200" y="164592"/>
-            <a:ext cx="10972800" cy="685800"/>
+            <a:ext cx="10972800" cy="553998"/>
           </a:xfrm>
           <a:prstGeom prst="rect">
             <a:avLst/>
@@ -11258,12 +11316,28 @@
           <a:p>
             <a:pPr algn="l"/>
             <a:r>
-              <a:rPr sz="3000" b="1" i="0">
+              <a:rPr sz="3000" b="1" i="0" dirty="0">
                 <a:solidFill>
                   <a:srgbClr val="00C2FF"/>
                 </a:solidFill>
               </a:rPr>
-              <a:t>Results — RR &amp; Attack Success Rate  (ε = 0.3, n = 2,000)</a:t>
+              <a:t>Results — RR &amp; Attack Success Rate  (</a:t>
+            </a:r>
+            <a:r>
+              <a:rPr sz="3000" b="1" i="0" dirty="0" err="1">
+                <a:solidFill>
+                  <a:srgbClr val="00C2FF"/>
+                </a:solidFill>
+              </a:rPr>
+              <a:t>ε</a:t>
+            </a:r>
+            <a:r>
+              <a:rPr sz="3000" b="1" i="0" dirty="0">
+                <a:solidFill>
+                  <a:srgbClr val="00C2FF"/>
+                </a:solidFill>
+              </a:rPr>
+              <a:t> = 0.3)</a:t>
             </a:r>
           </a:p>
         </p:txBody>
@@ -13035,7 +13109,7 @@
           <a:p>
             <a:pPr algn="l"/>
             <a:r>
-              <a:rPr sz="2000" b="1" i="0">
+              <a:rPr sz="2000" b="1" i="0" dirty="0">
                 <a:solidFill>
                   <a:srgbClr val="FF4545"/>
                 </a:solidFill>
@@ -13054,7 +13128,7 @@
         <p:spPr>
           <a:xfrm>
             <a:off x="704088" y="1600200"/>
-            <a:ext cx="10698480" cy="338554"/>
+            <a:ext cx="10698480" cy="1077218"/>
           </a:xfrm>
           <a:prstGeom prst="rect">
             <a:avLst/>
@@ -13069,29 +13143,28 @@
           <a:p>
             <a:pPr algn="l"/>
             <a:r>
-              <a:rPr sz="1600" b="0" i="0" dirty="0">
+              <a:rPr lang="en-US" sz="1600" b="0" i="0" dirty="0">
                 <a:solidFill>
                   <a:srgbClr val="CCE5FF"/>
                 </a:solidFill>
               </a:rPr>
-              <a:t>CNN achieves 99.1% clean accuracy, </a:t>
-            </a:r>
-            <a:r>
+              <a:t>The CNN gets 99.1% of images right under normal conditions, but a simple one-step attack (FGSM) is enough to fool it 32.6% of the time.</a:t>
+            </a:r>
+          </a:p>
+          <a:p>
+            <a:pPr algn="l"/>
+            <a:br>
               <a:rPr lang="en-US" sz="1600" b="0" i="0" dirty="0">
                 <a:solidFill>
                   <a:srgbClr val="CCE5FF"/>
                 </a:solidFill>
               </a:rPr>
-              <a:t>but even</a:t>
-            </a:r>
-            <a:r>
-              <a:rPr sz="1600" b="0" i="0" dirty="0">
-                <a:solidFill>
-                  <a:srgbClr val="CCE5FF"/>
-                </a:solidFill>
-              </a:rPr>
-              <a:t> FGSM alone fools it 32.6% of the time with perturbations invisible to humans.</a:t>
-            </a:r>
+            </a:br>
+            <a:endParaRPr sz="1600" b="0" i="0" dirty="0">
+              <a:solidFill>
+                <a:srgbClr val="CCE5FF"/>
+              </a:solidFill>
+            </a:endParaRPr>
           </a:p>
         </p:txBody>
       </p:sp>
@@ -13182,7 +13255,7 @@
         <p:spPr>
           <a:xfrm>
             <a:off x="704088" y="2916936"/>
-            <a:ext cx="10698480" cy="338554"/>
+            <a:ext cx="10698480" cy="584775"/>
           </a:xfrm>
           <a:prstGeom prst="rect">
             <a:avLst/>
@@ -13197,29 +13270,18 @@
           <a:p>
             <a:pPr algn="l"/>
             <a:r>
-              <a:rPr sz="1600" b="0" i="0" dirty="0">
+              <a:rPr lang="en-US" sz="1600" b="0" i="0" dirty="0">
                 <a:solidFill>
                   <a:srgbClr val="CCE5FF"/>
                 </a:solidFill>
               </a:rPr>
-              <a:t>FGSM (32.6%) vs I-FGSM/PGD (70.8%). Fifty small projected steps fully exploit the </a:t>
-            </a:r>
-            <a:r>
-              <a:rPr sz="1600" b="0" i="0" dirty="0" err="1">
-                <a:solidFill>
-                  <a:srgbClr val="CCE5FF"/>
-                </a:solidFill>
-              </a:rPr>
-              <a:t>ε</a:t>
-            </a:r>
-            <a:r>
-              <a:rPr sz="1600" b="0" i="0" dirty="0">
-                <a:solidFill>
-                  <a:srgbClr val="CCE5FF"/>
-                </a:solidFill>
-              </a:rPr>
-              <a:t> = 0.3.</a:t>
-            </a:r>
+              <a:t>FGSM takes one step and gets 32.6% success. I-FGSM/PGD repeats that step 50 times with small, controlled adjustments and reaches 70.8%. More steps means a much more damaging attack.</a:t>
+            </a:r>
+            <a:endParaRPr sz="1600" b="0" i="0" dirty="0">
+              <a:solidFill>
+                <a:srgbClr val="CCE5FF"/>
+              </a:solidFill>
+            </a:endParaRPr>
           </a:p>
         </p:txBody>
       </p:sp>
@@ -13310,7 +13372,7 @@
         <p:spPr>
           <a:xfrm>
             <a:off x="704088" y="4233672"/>
-            <a:ext cx="10698480" cy="338554"/>
+            <a:ext cx="10698480" cy="584775"/>
           </a:xfrm>
           <a:prstGeom prst="rect">
             <a:avLst/>
@@ -13325,13 +13387,18 @@
           <a:p>
             <a:pPr algn="l"/>
             <a:r>
-              <a:rPr sz="1600" b="0" i="0" dirty="0">
+              <a:rPr lang="en-US" sz="1600" b="0" i="0" dirty="0">
                 <a:solidFill>
                   <a:srgbClr val="CCE5FF"/>
                 </a:solidFill>
               </a:rPr>
-              <a:t>PGD (70.8%) &gt; MI-FGSM (61.5%). Random start explores a wider area than momentum alone.</a:t>
-            </a:r>
+              <a:t>PGD (70.8%) beats MI-FGSM (61.5%) because it starts from a random point before iterating. Starting from different spots helps it explore more of the attack space and find stronger perturbations than momentum alone.</a:t>
+            </a:r>
+            <a:endParaRPr sz="1600" b="0" i="0" dirty="0">
+              <a:solidFill>
+                <a:srgbClr val="CCE5FF"/>
+              </a:solidFill>
+            </a:endParaRPr>
           </a:p>
         </p:txBody>
       </p:sp>
@@ -13388,7 +13455,7 @@
         <p:spPr>
           <a:xfrm>
             <a:off x="704088" y="5111496"/>
-            <a:ext cx="10698480" cy="438912"/>
+            <a:ext cx="10698480" cy="400110"/>
           </a:xfrm>
           <a:prstGeom prst="rect">
             <a:avLst/>
@@ -13403,12 +13470,28 @@
           <a:p>
             <a:pPr algn="l"/>
             <a:r>
-              <a:rPr sz="2000" b="1" i="0">
+              <a:rPr sz="2000" b="1" i="0" dirty="0">
                 <a:solidFill>
                   <a:srgbClr val="00C2FF"/>
                 </a:solidFill>
               </a:rPr>
-              <a:t>Defence is necessary</a:t>
+              <a:t>Defen</a:t>
+            </a:r>
+            <a:r>
+              <a:rPr lang="en-US" sz="2000" b="1" i="0" dirty="0">
+                <a:solidFill>
+                  <a:srgbClr val="00C2FF"/>
+                </a:solidFill>
+              </a:rPr>
+              <a:t>s</a:t>
+            </a:r>
+            <a:r>
+              <a:rPr sz="2000" b="1" i="0" dirty="0">
+                <a:solidFill>
+                  <a:srgbClr val="00C2FF"/>
+                </a:solidFill>
+              </a:rPr>
+              <a:t>e is necessary</a:t>
             </a:r>
           </a:p>
         </p:txBody>
@@ -13422,7 +13505,7 @@
         <p:spPr>
           <a:xfrm>
             <a:off x="704088" y="5550408"/>
-            <a:ext cx="10698480" cy="621792"/>
+            <a:ext cx="10698480" cy="584775"/>
           </a:xfrm>
           <a:prstGeom prst="rect">
             <a:avLst/>
@@ -13435,1482 +13518,19 @@
           </a:bodyPr>
           <a:lstStyle/>
           <a:p>
-            <a:pPr algn="l"/>
-            <a:r>
-              <a:rPr sz="1600" b="0" i="0">
+            <a:r>
+              <a:rPr lang="en-US" sz="1600" b="0" i="0" dirty="0">
                 <a:solidFill>
                   <a:srgbClr val="CCE5FF"/>
                 </a:solidFill>
               </a:rPr>
-              <a:t>High clean accuracy cannot be trusted. Adversarial training, input purification, or certified defences are needed to close the robustness gap.</a:t>
-            </a:r>
-          </a:p>
-        </p:txBody>
-      </p:sp>
-    </p:spTree>
-  </p:cSld>
-  <p:clrMapOvr>
-    <a:masterClrMapping/>
-  </p:clrMapOvr>
-</p:sld>
-</file>
-
-<file path=ppt/slides/slide7.xml><?xml version="1.0" encoding="utf-8"?>
-<p:sld xmlns:a="http://schemas.openxmlformats.org/drawingml/2006/main" xmlns:r="http://schemas.openxmlformats.org/officeDocument/2006/relationships" xmlns:p="http://schemas.openxmlformats.org/presentationml/2006/main" show="0">
-  <p:cSld>
-    <p:spTree>
-      <p:nvGrpSpPr>
-        <p:cNvPr id="1" name=""/>
-        <p:cNvGrpSpPr/>
-        <p:nvPr/>
-      </p:nvGrpSpPr>
-      <p:grpSpPr>
-        <a:xfrm>
-          <a:off x="0" y="0"/>
-          <a:ext cx="0" cy="0"/>
-          <a:chOff x="0" y="0"/>
-          <a:chExt cx="0" cy="0"/>
-        </a:xfrm>
-      </p:grpSpPr>
-      <p:sp>
-        <p:nvSpPr>
-          <p:cNvPr id="4" name="TextBox 3"/>
-          <p:cNvSpPr txBox="1"/>
-          <p:nvPr/>
-        </p:nvSpPr>
-        <p:spPr>
-          <a:xfrm>
-            <a:off x="457200" y="164592"/>
-            <a:ext cx="10972800" cy="685800"/>
-          </a:xfrm>
-          <a:prstGeom prst="rect">
-            <a:avLst/>
-          </a:prstGeom>
-          <a:noFill/>
-        </p:spPr>
-        <p:txBody>
-          <a:bodyPr wrap="square">
-            <a:spAutoFit/>
-          </a:bodyPr>
-          <a:lstStyle/>
-          <a:p>
-            <a:pPr algn="l"/>
-            <a:r>
-              <a:rPr sz="3000" b="1" i="0">
-                <a:solidFill>
-                  <a:srgbClr val="00C2FF"/>
-                </a:solidFill>
-              </a:rPr>
-              <a:t>What Are Adversarial Examples?</a:t>
-            </a:r>
-          </a:p>
-        </p:txBody>
-      </p:sp>
-      <p:sp>
-        <p:nvSpPr>
-          <p:cNvPr id="6" name="TextBox 5"/>
-          <p:cNvSpPr txBox="1"/>
-          <p:nvPr/>
-        </p:nvSpPr>
-        <p:spPr>
-          <a:xfrm>
-            <a:off x="640080" y="1234440"/>
-            <a:ext cx="4937760" cy="4114800"/>
-          </a:xfrm>
-          <a:prstGeom prst="rect">
-            <a:avLst/>
-          </a:prstGeom>
-          <a:noFill/>
-        </p:spPr>
-        <p:txBody>
-          <a:bodyPr wrap="square">
-            <a:spAutoFit/>
-          </a:bodyPr>
-          <a:lstStyle/>
-          <a:p>
-            <a:pPr algn="l"/>
-            <a:r>
-              <a:rPr sz="2100" b="1" dirty="0">
-                <a:solidFill>
-                  <a:srgbClr val="00C2FF"/>
-                </a:solidFill>
-              </a:rPr>
-              <a:t>The Concept</a:t>
-            </a:r>
-          </a:p>
-          <a:p>
-            <a:pPr algn="l">
-              <a:spcBef>
-                <a:spcPts val="300"/>
-              </a:spcBef>
-            </a:pPr>
-            <a:r>
-              <a:rPr sz="1900" dirty="0">
-                <a:solidFill>
-                  <a:srgbClr val="CCE5FF"/>
-                </a:solidFill>
-              </a:rPr>
-              <a:t>•  A normal image + tiny, invisible perturbation</a:t>
-            </a:r>
-          </a:p>
-          <a:p>
-            <a:pPr algn="l">
-              <a:spcBef>
-                <a:spcPts val="300"/>
-              </a:spcBef>
-            </a:pPr>
-            <a:r>
-              <a:rPr sz="1900" dirty="0">
-                <a:solidFill>
-                  <a:srgbClr val="CCE5FF"/>
-                </a:solidFill>
-              </a:rPr>
-              <a:t>•  Perturbation crafted using the model's own gradients</a:t>
-            </a:r>
-          </a:p>
-          <a:p>
-            <a:pPr algn="l">
-              <a:spcBef>
-                <a:spcPts val="300"/>
-              </a:spcBef>
-            </a:pPr>
-            <a:r>
-              <a:rPr sz="1900" dirty="0">
-                <a:solidFill>
-                  <a:srgbClr val="CCE5FF"/>
-                </a:solidFill>
-              </a:rPr>
-              <a:t>•  Causes the model to misclassify with high confidence</a:t>
-            </a:r>
-          </a:p>
-          <a:p>
-            <a:pPr algn="l">
-              <a:spcBef>
-                <a:spcPts val="300"/>
-              </a:spcBef>
-            </a:pPr>
-            <a:r>
-              <a:rPr sz="1900" dirty="0">
-                <a:solidFill>
-                  <a:srgbClr val="CCE5FF"/>
-                </a:solidFill>
-              </a:rPr>
-              <a:t>•  Perturbation is imperceptible to humans</a:t>
-            </a:r>
-          </a:p>
-          <a:p>
-            <a:pPr algn="l">
-              <a:spcBef>
-                <a:spcPts val="300"/>
-              </a:spcBef>
-            </a:pPr>
-            <a:r>
-              <a:rPr sz="1900" dirty="0">
-                <a:solidFill>
-                  <a:srgbClr val="CCE5FF"/>
-                </a:solidFill>
-              </a:rPr>
-              <a:t>•  Exposes the gap between accuracy and robustness</a:t>
-            </a:r>
-          </a:p>
-        </p:txBody>
-      </p:sp>
-      <p:sp>
-        <p:nvSpPr>
-          <p:cNvPr id="8" name="TextBox 7"/>
-          <p:cNvSpPr txBox="1"/>
-          <p:nvPr/>
-        </p:nvSpPr>
-        <p:spPr>
-          <a:xfrm>
-            <a:off x="6400800" y="1261872"/>
-            <a:ext cx="5029200" cy="457200"/>
-          </a:xfrm>
-          <a:prstGeom prst="rect">
-            <a:avLst/>
-          </a:prstGeom>
-          <a:noFill/>
-        </p:spPr>
-        <p:txBody>
-          <a:bodyPr wrap="square">
-            <a:spAutoFit/>
-          </a:bodyPr>
-          <a:lstStyle/>
-          <a:p>
-            <a:pPr algn="l"/>
-            <a:r>
-              <a:rPr sz="1800" b="1" i="0">
-                <a:solidFill>
-                  <a:srgbClr val="00C2FF"/>
-                </a:solidFill>
-              </a:rPr>
-              <a:t>How it works</a:t>
-            </a:r>
-          </a:p>
-        </p:txBody>
-      </p:sp>
-      <p:sp>
-        <p:nvSpPr>
-          <p:cNvPr id="9" name="Rectangle 8"/>
-          <p:cNvSpPr/>
-          <p:nvPr/>
-        </p:nvSpPr>
-        <p:spPr>
-          <a:xfrm>
-            <a:off x="6400800" y="1783080"/>
-            <a:ext cx="457200" cy="621792"/>
-          </a:xfrm>
-          <a:prstGeom prst="rect">
-            <a:avLst/>
-          </a:prstGeom>
-          <a:solidFill>
-            <a:srgbClr val="FFFFFF"/>
-          </a:solidFill>
-          <a:ln>
-            <a:noFill/>
-          </a:ln>
-        </p:spPr>
-        <p:style>
-          <a:lnRef idx="1">
-            <a:schemeClr val="accent1"/>
-          </a:lnRef>
-          <a:fillRef idx="3">
-            <a:schemeClr val="accent1"/>
-          </a:fillRef>
-          <a:effectRef idx="2">
-            <a:schemeClr val="accent1"/>
-          </a:effectRef>
-          <a:fontRef idx="minor">
-            <a:schemeClr val="lt1"/>
-          </a:fontRef>
-        </p:style>
-        <p:txBody>
-          <a:bodyPr rtlCol="0" anchor="ctr"/>
-          <a:lstStyle/>
-          <a:p>
-            <a:pPr algn="ctr"/>
-            <a:endParaRPr/>
-          </a:p>
-        </p:txBody>
-      </p:sp>
-      <p:sp>
-        <p:nvSpPr>
-          <p:cNvPr id="10" name="TextBox 9"/>
-          <p:cNvSpPr txBox="1"/>
-          <p:nvPr/>
-        </p:nvSpPr>
-        <p:spPr>
-          <a:xfrm>
-            <a:off x="6400800" y="1874520"/>
-            <a:ext cx="457200" cy="457200"/>
-          </a:xfrm>
-          <a:prstGeom prst="rect">
-            <a:avLst/>
-          </a:prstGeom>
-          <a:noFill/>
-        </p:spPr>
-        <p:txBody>
-          <a:bodyPr wrap="square">
-            <a:spAutoFit/>
-          </a:bodyPr>
-          <a:lstStyle/>
-          <a:p>
-            <a:pPr algn="ctr"/>
-            <a:r>
-              <a:rPr sz="1800" b="1" i="0">
-                <a:solidFill>
-                  <a:srgbClr val="0D1B2A"/>
-                </a:solidFill>
-              </a:rPr>
-              <a:t>1</a:t>
-            </a:r>
-          </a:p>
-        </p:txBody>
-      </p:sp>
-      <p:sp>
-        <p:nvSpPr>
-          <p:cNvPr id="11" name="TextBox 10"/>
-          <p:cNvSpPr txBox="1"/>
-          <p:nvPr/>
-        </p:nvSpPr>
-        <p:spPr>
-          <a:xfrm>
-            <a:off x="6995160" y="1874520"/>
-            <a:ext cx="4389120" cy="502920"/>
-          </a:xfrm>
-          <a:prstGeom prst="rect">
-            <a:avLst/>
-          </a:prstGeom>
-          <a:noFill/>
-        </p:spPr>
-        <p:txBody>
-          <a:bodyPr wrap="square">
-            <a:spAutoFit/>
-          </a:bodyPr>
-          <a:lstStyle/>
-          <a:p>
-            <a:pPr algn="l"/>
-            <a:r>
-              <a:rPr sz="1800" b="0" i="0">
-                <a:solidFill>
-                  <a:srgbClr val="FFFFFF"/>
-                </a:solidFill>
-              </a:rPr>
-              <a:t>Input image  x</a:t>
-            </a:r>
-          </a:p>
-        </p:txBody>
-      </p:sp>
-      <p:sp>
-        <p:nvSpPr>
-          <p:cNvPr id="12" name="Rectangle 11"/>
-          <p:cNvSpPr/>
-          <p:nvPr/>
-        </p:nvSpPr>
-        <p:spPr>
-          <a:xfrm>
-            <a:off x="6400800" y="2560320"/>
-            <a:ext cx="457200" cy="621792"/>
-          </a:xfrm>
-          <a:prstGeom prst="rect">
-            <a:avLst/>
-          </a:prstGeom>
-          <a:solidFill>
-            <a:srgbClr val="FF9933"/>
-          </a:solidFill>
-          <a:ln>
-            <a:noFill/>
-          </a:ln>
-        </p:spPr>
-        <p:style>
-          <a:lnRef idx="1">
-            <a:schemeClr val="accent1"/>
-          </a:lnRef>
-          <a:fillRef idx="3">
-            <a:schemeClr val="accent1"/>
-          </a:fillRef>
-          <a:effectRef idx="2">
-            <a:schemeClr val="accent1"/>
-          </a:effectRef>
-          <a:fontRef idx="minor">
-            <a:schemeClr val="lt1"/>
-          </a:fontRef>
-        </p:style>
-        <p:txBody>
-          <a:bodyPr rtlCol="0" anchor="ctr"/>
-          <a:lstStyle/>
-          <a:p>
-            <a:pPr algn="ctr"/>
-            <a:endParaRPr/>
-          </a:p>
-        </p:txBody>
-      </p:sp>
-      <p:sp>
-        <p:nvSpPr>
-          <p:cNvPr id="13" name="TextBox 12"/>
-          <p:cNvSpPr txBox="1"/>
-          <p:nvPr/>
-        </p:nvSpPr>
-        <p:spPr>
-          <a:xfrm>
-            <a:off x="6400800" y="2651760"/>
-            <a:ext cx="457200" cy="457200"/>
-          </a:xfrm>
-          <a:prstGeom prst="rect">
-            <a:avLst/>
-          </a:prstGeom>
-          <a:noFill/>
-        </p:spPr>
-        <p:txBody>
-          <a:bodyPr wrap="square">
-            <a:spAutoFit/>
-          </a:bodyPr>
-          <a:lstStyle/>
-          <a:p>
-            <a:pPr algn="ctr"/>
-            <a:r>
-              <a:rPr sz="1800" b="1" i="0">
-                <a:solidFill>
-                  <a:srgbClr val="0D1B2A"/>
-                </a:solidFill>
-              </a:rPr>
-              <a:t>+</a:t>
-            </a:r>
-          </a:p>
-        </p:txBody>
-      </p:sp>
-      <p:sp>
-        <p:nvSpPr>
-          <p:cNvPr id="14" name="TextBox 13"/>
-          <p:cNvSpPr txBox="1"/>
-          <p:nvPr/>
-        </p:nvSpPr>
-        <p:spPr>
-          <a:xfrm>
-            <a:off x="6995160" y="2651760"/>
-            <a:ext cx="4389120" cy="502920"/>
-          </a:xfrm>
-          <a:prstGeom prst="rect">
-            <a:avLst/>
-          </a:prstGeom>
-          <a:noFill/>
-        </p:spPr>
-        <p:txBody>
-          <a:bodyPr wrap="square">
-            <a:spAutoFit/>
-          </a:bodyPr>
-          <a:lstStyle/>
-          <a:p>
-            <a:pPr algn="l"/>
-            <a:r>
-              <a:rPr sz="1800" b="0" i="0">
-                <a:solidFill>
-                  <a:srgbClr val="FFFFFF"/>
-                </a:solidFill>
-              </a:rPr>
-              <a:t>Compute  ∇ₓ L(f(x), y)</a:t>
-            </a:r>
-          </a:p>
-        </p:txBody>
-      </p:sp>
-      <p:sp>
-        <p:nvSpPr>
-          <p:cNvPr id="15" name="Rectangle 14"/>
-          <p:cNvSpPr/>
-          <p:nvPr/>
-        </p:nvSpPr>
-        <p:spPr>
-          <a:xfrm>
-            <a:off x="6400800" y="3337560"/>
-            <a:ext cx="457200" cy="621792"/>
-          </a:xfrm>
-          <a:prstGeom prst="rect">
-            <a:avLst/>
-          </a:prstGeom>
-          <a:solidFill>
-            <a:srgbClr val="FF4545"/>
-          </a:solidFill>
-          <a:ln>
-            <a:noFill/>
-          </a:ln>
-        </p:spPr>
-        <p:style>
-          <a:lnRef idx="1">
-            <a:schemeClr val="accent1"/>
-          </a:lnRef>
-          <a:fillRef idx="3">
-            <a:schemeClr val="accent1"/>
-          </a:fillRef>
-          <a:effectRef idx="2">
-            <a:schemeClr val="accent1"/>
-          </a:effectRef>
-          <a:fontRef idx="minor">
-            <a:schemeClr val="lt1"/>
-          </a:fontRef>
-        </p:style>
-        <p:txBody>
-          <a:bodyPr rtlCol="0" anchor="ctr"/>
-          <a:lstStyle/>
-          <a:p>
-            <a:pPr algn="ctr"/>
-            <a:endParaRPr/>
-          </a:p>
-        </p:txBody>
-      </p:sp>
-      <p:sp>
-        <p:nvSpPr>
-          <p:cNvPr id="16" name="TextBox 15"/>
-          <p:cNvSpPr txBox="1"/>
-          <p:nvPr/>
-        </p:nvSpPr>
-        <p:spPr>
-          <a:xfrm>
-            <a:off x="6400800" y="3429000"/>
-            <a:ext cx="457200" cy="457200"/>
-          </a:xfrm>
-          <a:prstGeom prst="rect">
-            <a:avLst/>
-          </a:prstGeom>
-          <a:noFill/>
-        </p:spPr>
-        <p:txBody>
-          <a:bodyPr wrap="square">
-            <a:spAutoFit/>
-          </a:bodyPr>
-          <a:lstStyle/>
-          <a:p>
-            <a:pPr algn="ctr"/>
-            <a:r>
-              <a:rPr sz="1800" b="1" i="0">
-                <a:solidFill>
-                  <a:srgbClr val="0D1B2A"/>
-                </a:solidFill>
-              </a:rPr>
-              <a:t>+</a:t>
-            </a:r>
-          </a:p>
-        </p:txBody>
-      </p:sp>
-      <p:sp>
-        <p:nvSpPr>
-          <p:cNvPr id="17" name="TextBox 16"/>
-          <p:cNvSpPr txBox="1"/>
-          <p:nvPr/>
-        </p:nvSpPr>
-        <p:spPr>
-          <a:xfrm>
-            <a:off x="6995160" y="3429000"/>
-            <a:ext cx="4389120" cy="502920"/>
-          </a:xfrm>
-          <a:prstGeom prst="rect">
-            <a:avLst/>
-          </a:prstGeom>
-          <a:noFill/>
-        </p:spPr>
-        <p:txBody>
-          <a:bodyPr wrap="square">
-            <a:spAutoFit/>
-          </a:bodyPr>
-          <a:lstStyle/>
-          <a:p>
-            <a:pPr algn="l"/>
-            <a:r>
-              <a:rPr sz="1800" b="0" i="0">
-                <a:solidFill>
-                  <a:srgbClr val="FFFFFF"/>
-                </a:solidFill>
-              </a:rPr>
-              <a:t>Scale by  ε · sign(∇ₓ L)</a:t>
-            </a:r>
-          </a:p>
-        </p:txBody>
-      </p:sp>
-      <p:sp>
-        <p:nvSpPr>
-          <p:cNvPr id="18" name="Rectangle 17"/>
-          <p:cNvSpPr/>
-          <p:nvPr/>
-        </p:nvSpPr>
-        <p:spPr>
-          <a:xfrm>
-            <a:off x="6400800" y="4114800"/>
-            <a:ext cx="457200" cy="621792"/>
-          </a:xfrm>
-          <a:prstGeom prst="rect">
-            <a:avLst/>
-          </a:prstGeom>
-          <a:solidFill>
-            <a:srgbClr val="FFD700"/>
-          </a:solidFill>
-          <a:ln>
-            <a:noFill/>
-          </a:ln>
-        </p:spPr>
-        <p:style>
-          <a:lnRef idx="1">
-            <a:schemeClr val="accent1"/>
-          </a:lnRef>
-          <a:fillRef idx="3">
-            <a:schemeClr val="accent1"/>
-          </a:fillRef>
-          <a:effectRef idx="2">
-            <a:schemeClr val="accent1"/>
-          </a:effectRef>
-          <a:fontRef idx="minor">
-            <a:schemeClr val="lt1"/>
-          </a:fontRef>
-        </p:style>
-        <p:txBody>
-          <a:bodyPr rtlCol="0" anchor="ctr"/>
-          <a:lstStyle/>
-          <a:p>
-            <a:pPr algn="ctr"/>
-            <a:endParaRPr/>
-          </a:p>
-        </p:txBody>
-      </p:sp>
-      <p:sp>
-        <p:nvSpPr>
-          <p:cNvPr id="19" name="TextBox 18"/>
-          <p:cNvSpPr txBox="1"/>
-          <p:nvPr/>
-        </p:nvSpPr>
-        <p:spPr>
-          <a:xfrm>
-            <a:off x="6400800" y="4206240"/>
-            <a:ext cx="457200" cy="457200"/>
-          </a:xfrm>
-          <a:prstGeom prst="rect">
-            <a:avLst/>
-          </a:prstGeom>
-          <a:noFill/>
-        </p:spPr>
-        <p:txBody>
-          <a:bodyPr wrap="square">
-            <a:spAutoFit/>
-          </a:bodyPr>
-          <a:lstStyle/>
-          <a:p>
-            <a:pPr algn="ctr"/>
-            <a:r>
-              <a:rPr sz="1800" b="1" i="0">
-                <a:solidFill>
-                  <a:srgbClr val="0D1B2A"/>
-                </a:solidFill>
-              </a:rPr>
-              <a:t>=</a:t>
-            </a:r>
-          </a:p>
-        </p:txBody>
-      </p:sp>
-      <p:sp>
-        <p:nvSpPr>
-          <p:cNvPr id="20" name="TextBox 19"/>
-          <p:cNvSpPr txBox="1"/>
-          <p:nvPr/>
-        </p:nvSpPr>
-        <p:spPr>
-          <a:xfrm>
-            <a:off x="6995160" y="4206240"/>
-            <a:ext cx="4389120" cy="502920"/>
-          </a:xfrm>
-          <a:prstGeom prst="rect">
-            <a:avLst/>
-          </a:prstGeom>
-          <a:noFill/>
-        </p:spPr>
-        <p:txBody>
-          <a:bodyPr wrap="square">
-            <a:spAutoFit/>
-          </a:bodyPr>
-          <a:lstStyle/>
-          <a:p>
-            <a:pPr algn="l"/>
-            <a:r>
-              <a:rPr sz="1800" b="0" i="0">
-                <a:solidFill>
-                  <a:srgbClr val="FFFFFF"/>
-                </a:solidFill>
-              </a:rPr>
-              <a:t>Adversarial image  x_adv</a:t>
-            </a:r>
-          </a:p>
-        </p:txBody>
-      </p:sp>
-      <p:sp>
-        <p:nvSpPr>
-          <p:cNvPr id="21" name="Rectangle 20"/>
-          <p:cNvSpPr/>
-          <p:nvPr/>
-        </p:nvSpPr>
-        <p:spPr>
-          <a:xfrm>
-            <a:off x="6400800" y="4892040"/>
-            <a:ext cx="457200" cy="621792"/>
-          </a:xfrm>
-          <a:prstGeom prst="rect">
-            <a:avLst/>
-          </a:prstGeom>
-          <a:solidFill>
-            <a:srgbClr val="4CAF50"/>
-          </a:solidFill>
-          <a:ln>
-            <a:noFill/>
-          </a:ln>
-        </p:spPr>
-        <p:style>
-          <a:lnRef idx="1">
-            <a:schemeClr val="accent1"/>
-          </a:lnRef>
-          <a:fillRef idx="3">
-            <a:schemeClr val="accent1"/>
-          </a:fillRef>
-          <a:effectRef idx="2">
-            <a:schemeClr val="accent1"/>
-          </a:effectRef>
-          <a:fontRef idx="minor">
-            <a:schemeClr val="lt1"/>
-          </a:fontRef>
-        </p:style>
-        <p:txBody>
-          <a:bodyPr rtlCol="0" anchor="ctr"/>
-          <a:lstStyle/>
-          <a:p>
-            <a:pPr algn="ctr"/>
-            <a:endParaRPr/>
-          </a:p>
-        </p:txBody>
-      </p:sp>
-      <p:sp>
-        <p:nvSpPr>
-          <p:cNvPr id="22" name="TextBox 21"/>
-          <p:cNvSpPr txBox="1"/>
-          <p:nvPr/>
-        </p:nvSpPr>
-        <p:spPr>
-          <a:xfrm>
-            <a:off x="6400800" y="4983480"/>
-            <a:ext cx="457200" cy="457200"/>
-          </a:xfrm>
-          <a:prstGeom prst="rect">
-            <a:avLst/>
-          </a:prstGeom>
-          <a:noFill/>
-        </p:spPr>
-        <p:txBody>
-          <a:bodyPr wrap="square">
-            <a:spAutoFit/>
-          </a:bodyPr>
-          <a:lstStyle/>
-          <a:p>
-            <a:pPr algn="ctr"/>
-            <a:r>
-              <a:rPr sz="1800" b="1" i="0">
-                <a:solidFill>
-                  <a:srgbClr val="0D1B2A"/>
-                </a:solidFill>
-              </a:rPr>
-              <a:t>→</a:t>
-            </a:r>
-          </a:p>
-        </p:txBody>
-      </p:sp>
-      <p:sp>
-        <p:nvSpPr>
-          <p:cNvPr id="23" name="TextBox 22"/>
-          <p:cNvSpPr txBox="1"/>
-          <p:nvPr/>
-        </p:nvSpPr>
-        <p:spPr>
-          <a:xfrm>
-            <a:off x="6995160" y="4983480"/>
-            <a:ext cx="4389120" cy="502920"/>
-          </a:xfrm>
-          <a:prstGeom prst="rect">
-            <a:avLst/>
-          </a:prstGeom>
-          <a:noFill/>
-        </p:spPr>
-        <p:txBody>
-          <a:bodyPr wrap="square">
-            <a:spAutoFit/>
-          </a:bodyPr>
-          <a:lstStyle/>
-          <a:p>
-            <a:pPr algn="l"/>
-            <a:r>
-              <a:rPr sz="1800" b="0" i="0">
-                <a:solidFill>
-                  <a:srgbClr val="FFFFFF"/>
-                </a:solidFill>
-              </a:rPr>
-              <a:t>CNN predicts wrong label!</a:t>
-            </a:r>
-          </a:p>
-        </p:txBody>
-      </p:sp>
-      <p:sp>
-        <p:nvSpPr>
-          <p:cNvPr id="24" name="TextBox 23"/>
-          <p:cNvSpPr txBox="1"/>
-          <p:nvPr/>
-        </p:nvSpPr>
-        <p:spPr>
-          <a:xfrm>
-            <a:off x="6400800" y="5760720"/>
-            <a:ext cx="5029200" cy="365760"/>
-          </a:xfrm>
-          <a:prstGeom prst="rect">
-            <a:avLst/>
-          </a:prstGeom>
-          <a:noFill/>
-        </p:spPr>
-        <p:txBody>
-          <a:bodyPr wrap="square">
-            <a:spAutoFit/>
-          </a:bodyPr>
-          <a:lstStyle/>
-          <a:p>
-            <a:pPr algn="l"/>
-            <a:r>
-              <a:rPr sz="1400" b="0" i="1">
-                <a:solidFill>
-                  <a:srgbClr val="AABBCC"/>
-                </a:solidFill>
-              </a:rPr>
-              <a:t>ε = 0.3 in this assignment (ℓ∞ norm budget)</a:t>
-            </a:r>
-          </a:p>
-        </p:txBody>
-      </p:sp>
-    </p:spTree>
-  </p:cSld>
-  <p:clrMapOvr>
-    <a:masterClrMapping/>
-  </p:clrMapOvr>
-</p:sld>
-</file>
-
-<file path=ppt/slides/slide8.xml><?xml version="1.0" encoding="utf-8"?>
-<p:sld xmlns:a="http://schemas.openxmlformats.org/drawingml/2006/main" xmlns:r="http://schemas.openxmlformats.org/officeDocument/2006/relationships" xmlns:p="http://schemas.openxmlformats.org/presentationml/2006/main" show="0">
-  <p:cSld>
-    <p:spTree>
-      <p:nvGrpSpPr>
-        <p:cNvPr id="1" name=""/>
-        <p:cNvGrpSpPr/>
-        <p:nvPr/>
-      </p:nvGrpSpPr>
-      <p:grpSpPr>
-        <a:xfrm>
-          <a:off x="0" y="0"/>
-          <a:ext cx="0" cy="0"/>
-          <a:chOff x="0" y="0"/>
-          <a:chExt cx="0" cy="0"/>
-        </a:xfrm>
-      </p:grpSpPr>
-      <p:sp>
-        <p:nvSpPr>
-          <p:cNvPr id="4" name="TextBox 3"/>
-          <p:cNvSpPr txBox="1"/>
-          <p:nvPr/>
-        </p:nvSpPr>
-        <p:spPr>
-          <a:xfrm>
-            <a:off x="457200" y="164592"/>
-            <a:ext cx="10972800" cy="685800"/>
-          </a:xfrm>
-          <a:prstGeom prst="rect">
-            <a:avLst/>
-          </a:prstGeom>
-          <a:noFill/>
-        </p:spPr>
-        <p:txBody>
-          <a:bodyPr wrap="square">
-            <a:spAutoFit/>
-          </a:bodyPr>
-          <a:lstStyle/>
-          <a:p>
-            <a:pPr algn="l"/>
-            <a:r>
-              <a:rPr sz="3000" b="1" i="0">
-                <a:solidFill>
-                  <a:srgbClr val="00C2FF"/>
-                </a:solidFill>
-              </a:rPr>
-              <a:t>Attack Mechanics — Key Formulas</a:t>
-            </a:r>
-          </a:p>
-        </p:txBody>
-      </p:sp>
-      <p:sp>
-        <p:nvSpPr>
-          <p:cNvPr id="6" name="TextBox 5"/>
-          <p:cNvSpPr txBox="1"/>
-          <p:nvPr/>
-        </p:nvSpPr>
-        <p:spPr>
-          <a:xfrm>
-            <a:off x="594360" y="1170432"/>
-            <a:ext cx="3383280" cy="502920"/>
-          </a:xfrm>
-          <a:prstGeom prst="rect">
-            <a:avLst/>
-          </a:prstGeom>
-          <a:noFill/>
-        </p:spPr>
-        <p:txBody>
-          <a:bodyPr wrap="square">
-            <a:spAutoFit/>
-          </a:bodyPr>
-          <a:lstStyle/>
-          <a:p>
-            <a:pPr algn="l"/>
-            <a:r>
-              <a:rPr sz="2200" b="1" i="0">
-                <a:solidFill>
-                  <a:srgbClr val="FF4545"/>
-                </a:solidFill>
-              </a:rPr>
-              <a:t>FGSM</a:t>
-            </a:r>
-          </a:p>
-        </p:txBody>
-      </p:sp>
-      <p:sp>
-        <p:nvSpPr>
-          <p:cNvPr id="7" name="TextBox 6"/>
-          <p:cNvSpPr txBox="1"/>
-          <p:nvPr/>
-        </p:nvSpPr>
-        <p:spPr>
-          <a:xfrm>
-            <a:off x="594360" y="1783080"/>
-            <a:ext cx="3383280" cy="713232"/>
-          </a:xfrm>
-          <a:prstGeom prst="rect">
-            <a:avLst/>
-          </a:prstGeom>
-          <a:noFill/>
-        </p:spPr>
-        <p:txBody>
-          <a:bodyPr wrap="square">
-            <a:spAutoFit/>
-          </a:bodyPr>
-          <a:lstStyle/>
-          <a:p>
-            <a:pPr algn="l"/>
-            <a:r>
-              <a:rPr sz="1600" b="1" i="0">
-                <a:solidFill>
-                  <a:srgbClr val="FFFFFF"/>
-                </a:solidFill>
-              </a:rPr>
-              <a:t>x_adv = x + ε · sign( ∇ₓ L )</a:t>
-            </a:r>
-          </a:p>
-        </p:txBody>
-      </p:sp>
-      <p:sp>
-        <p:nvSpPr>
-          <p:cNvPr id="8" name="TextBox 7"/>
-          <p:cNvSpPr txBox="1"/>
-          <p:nvPr/>
-        </p:nvSpPr>
-        <p:spPr>
-          <a:xfrm>
-            <a:off x="594360" y="2532888"/>
-            <a:ext cx="3383280" cy="713232"/>
-          </a:xfrm>
-          <a:prstGeom prst="rect">
-            <a:avLst/>
-          </a:prstGeom>
-          <a:noFill/>
-        </p:spPr>
-        <p:txBody>
-          <a:bodyPr wrap="square">
-            <a:spAutoFit/>
-          </a:bodyPr>
-          <a:lstStyle/>
-          <a:p>
-            <a:pPr algn="l"/>
-            <a:r>
-              <a:rPr sz="1600" b="1" i="0">
-                <a:solidFill>
-                  <a:srgbClr val="FFFFFF"/>
-                </a:solidFill>
-              </a:rPr>
-              <a:t>ASR = 32.6%</a:t>
-            </a:r>
-          </a:p>
-        </p:txBody>
-      </p:sp>
-      <p:sp>
-        <p:nvSpPr>
-          <p:cNvPr id="9" name="TextBox 8"/>
-          <p:cNvSpPr txBox="1"/>
-          <p:nvPr/>
-        </p:nvSpPr>
-        <p:spPr>
-          <a:xfrm>
-            <a:off x="594360" y="3282696"/>
-            <a:ext cx="3383280" cy="713232"/>
-          </a:xfrm>
-          <a:prstGeom prst="rect">
-            <a:avLst/>
-          </a:prstGeom>
-          <a:noFill/>
-        </p:spPr>
-        <p:txBody>
-          <a:bodyPr wrap="square">
-            <a:spAutoFit/>
-          </a:bodyPr>
-          <a:lstStyle/>
-          <a:p>
-            <a:pPr algn="l"/>
-            <a:r>
-              <a:rPr sz="1600" b="0" i="0">
-                <a:solidFill>
-                  <a:srgbClr val="CCE5FF"/>
-                </a:solidFill>
-              </a:rPr>
-              <a:t>One gradient computation</a:t>
-            </a:r>
-          </a:p>
-        </p:txBody>
-      </p:sp>
-      <p:sp>
-        <p:nvSpPr>
-          <p:cNvPr id="10" name="TextBox 9"/>
-          <p:cNvSpPr txBox="1"/>
-          <p:nvPr/>
-        </p:nvSpPr>
-        <p:spPr>
-          <a:xfrm>
-            <a:off x="594360" y="4032504"/>
-            <a:ext cx="3383280" cy="713232"/>
-          </a:xfrm>
-          <a:prstGeom prst="rect">
-            <a:avLst/>
-          </a:prstGeom>
-          <a:noFill/>
-        </p:spPr>
-        <p:txBody>
-          <a:bodyPr wrap="square">
-            <a:spAutoFit/>
-          </a:bodyPr>
-          <a:lstStyle/>
-          <a:p>
-            <a:pPr algn="l"/>
-            <a:r>
-              <a:rPr sz="1600" b="0" i="0">
-                <a:solidFill>
-                  <a:srgbClr val="CCE5FF"/>
-                </a:solidFill>
-              </a:rPr>
-              <a:t>Step size = ε (full budget at once)</a:t>
-            </a:r>
-          </a:p>
-        </p:txBody>
-      </p:sp>
-      <p:sp>
-        <p:nvSpPr>
-          <p:cNvPr id="11" name="TextBox 10"/>
-          <p:cNvSpPr txBox="1"/>
-          <p:nvPr/>
-        </p:nvSpPr>
-        <p:spPr>
-          <a:xfrm>
-            <a:off x="594360" y="4782312"/>
-            <a:ext cx="3383280" cy="713232"/>
-          </a:xfrm>
-          <a:prstGeom prst="rect">
-            <a:avLst/>
-          </a:prstGeom>
-          <a:noFill/>
-        </p:spPr>
-        <p:txBody>
-          <a:bodyPr wrap="square">
-            <a:spAutoFit/>
-          </a:bodyPr>
-          <a:lstStyle/>
-          <a:p>
-            <a:pPr algn="l"/>
-            <a:r>
-              <a:rPr sz="1600" b="0" i="0">
-                <a:solidFill>
-                  <a:srgbClr val="CCE5FF"/>
-                </a:solidFill>
-              </a:rPr>
-              <a:t>Fast but weakest — budget underused</a:t>
-            </a:r>
-          </a:p>
-        </p:txBody>
-      </p:sp>
-      <p:sp>
-        <p:nvSpPr>
-          <p:cNvPr id="13" name="TextBox 12"/>
-          <p:cNvSpPr txBox="1"/>
-          <p:nvPr/>
-        </p:nvSpPr>
-        <p:spPr>
-          <a:xfrm>
-            <a:off x="4389120" y="1170432"/>
-            <a:ext cx="3383280" cy="502920"/>
-          </a:xfrm>
-          <a:prstGeom prst="rect">
-            <a:avLst/>
-          </a:prstGeom>
-          <a:noFill/>
-        </p:spPr>
-        <p:txBody>
-          <a:bodyPr wrap="square">
-            <a:spAutoFit/>
-          </a:bodyPr>
-          <a:lstStyle/>
-          <a:p>
-            <a:pPr algn="l"/>
-            <a:r>
-              <a:rPr sz="2200" b="1" i="0">
-                <a:solidFill>
-                  <a:srgbClr val="4CAF50"/>
-                </a:solidFill>
-              </a:rPr>
-              <a:t>I-FGSM / PGD</a:t>
-            </a:r>
-          </a:p>
-        </p:txBody>
-      </p:sp>
-      <p:sp>
-        <p:nvSpPr>
-          <p:cNvPr id="14" name="TextBox 13"/>
-          <p:cNvSpPr txBox="1"/>
-          <p:nvPr/>
-        </p:nvSpPr>
-        <p:spPr>
-          <a:xfrm>
-            <a:off x="4389120" y="1783080"/>
-            <a:ext cx="3383280" cy="713232"/>
-          </a:xfrm>
-          <a:prstGeom prst="rect">
-            <a:avLst/>
-          </a:prstGeom>
-          <a:noFill/>
-        </p:spPr>
-        <p:txBody>
-          <a:bodyPr wrap="square">
-            <a:spAutoFit/>
-          </a:bodyPr>
-          <a:lstStyle/>
-          <a:p>
-            <a:pPr algn="l"/>
-            <a:r>
-              <a:rPr sz="1600" b="1" i="0">
-                <a:solidFill>
-                  <a:srgbClr val="FFFFFF"/>
-                </a:solidFill>
-              </a:rPr>
-              <a:t>x⁰ ~ Uniform(x−ε, x+ε)   [random start]</a:t>
-            </a:r>
-          </a:p>
-        </p:txBody>
-      </p:sp>
-      <p:sp>
-        <p:nvSpPr>
-          <p:cNvPr id="15" name="TextBox 14"/>
-          <p:cNvSpPr txBox="1"/>
-          <p:nvPr/>
-        </p:nvSpPr>
-        <p:spPr>
-          <a:xfrm>
-            <a:off x="4389120" y="2532888"/>
-            <a:ext cx="3383280" cy="713232"/>
-          </a:xfrm>
-          <a:prstGeom prst="rect">
-            <a:avLst/>
-          </a:prstGeom>
-          <a:noFill/>
-        </p:spPr>
-        <p:txBody>
-          <a:bodyPr wrap="square">
-            <a:spAutoFit/>
-          </a:bodyPr>
-          <a:lstStyle/>
-          <a:p>
-            <a:pPr algn="l"/>
-            <a:r>
-              <a:rPr sz="1600" b="1" i="0">
-                <a:solidFill>
-                  <a:srgbClr val="FFFFFF"/>
-                </a:solidFill>
-              </a:rPr>
-              <a:t>xᵗ⁺¹ = Projₓ±ε( xᵗ + α·sign(∇ₓL) )</a:t>
-            </a:r>
-          </a:p>
-        </p:txBody>
-      </p:sp>
-      <p:sp>
-        <p:nvSpPr>
-          <p:cNvPr id="16" name="TextBox 15"/>
-          <p:cNvSpPr txBox="1"/>
-          <p:nvPr/>
-        </p:nvSpPr>
-        <p:spPr>
-          <a:xfrm>
-            <a:off x="4389120" y="3282696"/>
-            <a:ext cx="3383280" cy="713232"/>
-          </a:xfrm>
-          <a:prstGeom prst="rect">
-            <a:avLst/>
-          </a:prstGeom>
-          <a:noFill/>
-        </p:spPr>
-        <p:txBody>
-          <a:bodyPr wrap="square">
-            <a:spAutoFit/>
-          </a:bodyPr>
-          <a:lstStyle/>
-          <a:p>
-            <a:pPr algn="l"/>
-            <a:r>
-              <a:rPr sz="1600" b="0" i="0">
-                <a:solidFill>
-                  <a:srgbClr val="CCE5FF"/>
-                </a:solidFill>
-              </a:rPr>
-              <a:t>ASR = 70.8%  ← Strongest ★</a:t>
-            </a:r>
-          </a:p>
-        </p:txBody>
-      </p:sp>
-      <p:sp>
-        <p:nvSpPr>
-          <p:cNvPr id="17" name="TextBox 16"/>
-          <p:cNvSpPr txBox="1"/>
-          <p:nvPr/>
-        </p:nvSpPr>
-        <p:spPr>
-          <a:xfrm>
-            <a:off x="4389120" y="4032504"/>
-            <a:ext cx="3383280" cy="713232"/>
-          </a:xfrm>
-          <a:prstGeom prst="rect">
-            <a:avLst/>
-          </a:prstGeom>
-          <a:noFill/>
-        </p:spPr>
-        <p:txBody>
-          <a:bodyPr wrap="square">
-            <a:spAutoFit/>
-          </a:bodyPr>
-          <a:lstStyle/>
-          <a:p>
-            <a:pPr algn="l"/>
-            <a:r>
-              <a:rPr sz="1600" b="0" i="0">
-                <a:solidFill>
-                  <a:srgbClr val="CCE5FF"/>
-                </a:solidFill>
-              </a:rPr>
-              <a:t>50 iterations,  α = 0.01</a:t>
-            </a:r>
-          </a:p>
-        </p:txBody>
-      </p:sp>
-      <p:sp>
-        <p:nvSpPr>
-          <p:cNvPr id="18" name="TextBox 17"/>
-          <p:cNvSpPr txBox="1"/>
-          <p:nvPr/>
-        </p:nvSpPr>
-        <p:spPr>
-          <a:xfrm>
-            <a:off x="4389120" y="4782312"/>
-            <a:ext cx="3383280" cy="713232"/>
-          </a:xfrm>
-          <a:prstGeom prst="rect">
-            <a:avLst/>
-          </a:prstGeom>
-          <a:noFill/>
-        </p:spPr>
-        <p:txBody>
-          <a:bodyPr wrap="square">
-            <a:spAutoFit/>
-          </a:bodyPr>
-          <a:lstStyle/>
-          <a:p>
-            <a:pPr algn="l"/>
-            <a:r>
-              <a:rPr sz="1600" b="0" i="0">
-                <a:solidFill>
-                  <a:srgbClr val="CCE5FF"/>
-                </a:solidFill>
-              </a:rPr>
-              <a:t>Projection keeps each step valid</a:t>
-            </a:r>
-          </a:p>
-        </p:txBody>
-      </p:sp>
-      <p:sp>
-        <p:nvSpPr>
-          <p:cNvPr id="20" name="TextBox 19"/>
-          <p:cNvSpPr txBox="1"/>
-          <p:nvPr/>
-        </p:nvSpPr>
-        <p:spPr>
-          <a:xfrm>
-            <a:off x="8183880" y="1170432"/>
-            <a:ext cx="3383280" cy="502920"/>
-          </a:xfrm>
-          <a:prstGeom prst="rect">
-            <a:avLst/>
-          </a:prstGeom>
-          <a:noFill/>
-        </p:spPr>
-        <p:txBody>
-          <a:bodyPr wrap="square">
-            <a:spAutoFit/>
-          </a:bodyPr>
-          <a:lstStyle/>
-          <a:p>
-            <a:pPr algn="l"/>
-            <a:r>
-              <a:rPr sz="2200" b="1" i="0">
-                <a:solidFill>
-                  <a:srgbClr val="FF9933"/>
-                </a:solidFill>
-              </a:rPr>
-              <a:t>MI-FGSM</a:t>
-            </a:r>
-          </a:p>
-        </p:txBody>
-      </p:sp>
-      <p:sp>
-        <p:nvSpPr>
-          <p:cNvPr id="21" name="TextBox 20"/>
-          <p:cNvSpPr txBox="1"/>
-          <p:nvPr/>
-        </p:nvSpPr>
-        <p:spPr>
-          <a:xfrm>
-            <a:off x="8183880" y="1783080"/>
-            <a:ext cx="3383280" cy="713232"/>
-          </a:xfrm>
-          <a:prstGeom prst="rect">
-            <a:avLst/>
-          </a:prstGeom>
-          <a:noFill/>
-        </p:spPr>
-        <p:txBody>
-          <a:bodyPr wrap="square">
-            <a:spAutoFit/>
-          </a:bodyPr>
-          <a:lstStyle/>
-          <a:p>
-            <a:pPr algn="l"/>
-            <a:r>
-              <a:rPr sz="1600" b="1" i="0">
-                <a:solidFill>
-                  <a:srgbClr val="FFFFFF"/>
-                </a:solidFill>
-              </a:rPr>
-              <a:t>gᵗ⁺¹ = μ·gᵗ + ∇ₓL / ‖∇ₓL‖₁</a:t>
-            </a:r>
-          </a:p>
-        </p:txBody>
-      </p:sp>
-      <p:sp>
-        <p:nvSpPr>
-          <p:cNvPr id="22" name="TextBox 21"/>
-          <p:cNvSpPr txBox="1"/>
-          <p:nvPr/>
-        </p:nvSpPr>
-        <p:spPr>
-          <a:xfrm>
-            <a:off x="8183880" y="2532888"/>
-            <a:ext cx="3383280" cy="713232"/>
-          </a:xfrm>
-          <a:prstGeom prst="rect">
-            <a:avLst/>
-          </a:prstGeom>
-          <a:noFill/>
-        </p:spPr>
-        <p:txBody>
-          <a:bodyPr wrap="square">
-            <a:spAutoFit/>
-          </a:bodyPr>
-          <a:lstStyle/>
-          <a:p>
-            <a:pPr algn="l"/>
-            <a:r>
-              <a:rPr sz="1600" b="1" i="0">
-                <a:solidFill>
-                  <a:srgbClr val="FFFFFF"/>
-                </a:solidFill>
-              </a:rPr>
-              <a:t>xᵗ⁺¹ = Projₓ±ε( xᵗ + α·sign(gᵗ⁺¹) )</a:t>
-            </a:r>
-          </a:p>
-        </p:txBody>
-      </p:sp>
-      <p:sp>
-        <p:nvSpPr>
-          <p:cNvPr id="23" name="TextBox 22"/>
-          <p:cNvSpPr txBox="1"/>
-          <p:nvPr/>
-        </p:nvSpPr>
-        <p:spPr>
-          <a:xfrm>
-            <a:off x="8183880" y="3282696"/>
-            <a:ext cx="3383280" cy="713232"/>
-          </a:xfrm>
-          <a:prstGeom prst="rect">
-            <a:avLst/>
-          </a:prstGeom>
-          <a:noFill/>
-        </p:spPr>
-        <p:txBody>
-          <a:bodyPr wrap="square">
-            <a:spAutoFit/>
-          </a:bodyPr>
-          <a:lstStyle/>
-          <a:p>
-            <a:pPr algn="l"/>
-            <a:r>
-              <a:rPr sz="1600" b="0" i="0">
-                <a:solidFill>
-                  <a:srgbClr val="CCE5FF"/>
-                </a:solidFill>
-              </a:rPr>
-              <a:t>ASR = 61.5%  — second</a:t>
-            </a:r>
-          </a:p>
-        </p:txBody>
-      </p:sp>
-      <p:sp>
-        <p:nvSpPr>
-          <p:cNvPr id="24" name="TextBox 23"/>
-          <p:cNvSpPr txBox="1"/>
-          <p:nvPr/>
-        </p:nvSpPr>
-        <p:spPr>
-          <a:xfrm>
-            <a:off x="8183880" y="4032504"/>
-            <a:ext cx="3383280" cy="713232"/>
-          </a:xfrm>
-          <a:prstGeom prst="rect">
-            <a:avLst/>
-          </a:prstGeom>
-          <a:noFill/>
-        </p:spPr>
-        <p:txBody>
-          <a:bodyPr wrap="square">
-            <a:spAutoFit/>
-          </a:bodyPr>
-          <a:lstStyle/>
-          <a:p>
-            <a:pPr algn="l"/>
-            <a:r>
-              <a:rPr sz="1600" b="0" i="0">
-                <a:solidFill>
-                  <a:srgbClr val="CCE5FF"/>
-                </a:solidFill>
-              </a:rPr>
-              <a:t>μ = 1.0  (full momentum carry)</a:t>
-            </a:r>
-          </a:p>
-        </p:txBody>
-      </p:sp>
-      <p:sp>
-        <p:nvSpPr>
-          <p:cNvPr id="25" name="TextBox 24"/>
-          <p:cNvSpPr txBox="1"/>
-          <p:nvPr/>
-        </p:nvSpPr>
-        <p:spPr>
-          <a:xfrm>
-            <a:off x="8183880" y="4782312"/>
-            <a:ext cx="3383280" cy="713232"/>
-          </a:xfrm>
-          <a:prstGeom prst="rect">
-            <a:avLst/>
-          </a:prstGeom>
-          <a:noFill/>
-        </p:spPr>
-        <p:txBody>
-          <a:bodyPr wrap="square">
-            <a:spAutoFit/>
-          </a:bodyPr>
-          <a:lstStyle/>
-          <a:p>
-            <a:pPr algn="l"/>
-            <a:r>
-              <a:rPr sz="1600" b="0" i="0">
-                <a:solidFill>
-                  <a:srgbClr val="CCE5FF"/>
-                </a:solidFill>
-              </a:rPr>
-              <a:t>Smoother direction, more transferable</a:t>
-            </a:r>
+              <a:t>A model with 99% clean accuracy can still be easily fooled. To build a truly robust model, it needs to be trained on adversarial examples, or protected with other defense techniques like input filtering.</a:t>
+            </a:r>
+            <a:endParaRPr sz="1600" b="0" i="0" dirty="0">
+              <a:solidFill>
+                <a:srgbClr val="CCE5FF"/>
+              </a:solidFill>
+            </a:endParaRPr>
           </a:p>
         </p:txBody>
       </p:sp>
